--- a/CodeLingo_Pitch_Deck.pptx
+++ b/CodeLingo_Pitch_Deck.pptx
@@ -16,7 +16,7 @@
     <p:sldId id="264" r:id="rId15"/>
     <p:sldId id="265" r:id="rId16"/>
   </p:sldIdLst>
-  <p:sldSz cx="9144000" cy="6858000" type="screen4x3"/>
+  <p:sldSz cx="12191695" cy="6858000" type="screen4x3"/>
   <p:notesSz cx="6858000" cy="9144000"/>
   <p:defaultTextStyle>
     <a:defPPr>
@@ -3090,6 +3090,14 @@
 <file path=ppt/slides/slide1.xml><?xml version="1.0" encoding="utf-8"?>
 <p:sld xmlns:a="http://schemas.openxmlformats.org/drawingml/2006/main" xmlns:p="http://schemas.openxmlformats.org/presentationml/2006/main" xmlns:r="http://schemas.openxmlformats.org/officeDocument/2006/relationships">
   <p:cSld>
+    <p:bg>
+      <p:bgPr>
+        <a:solidFill>
+          <a:srgbClr val="F0F0F0"/>
+        </a:solidFill>
+        <a:effectLst/>
+      </p:bgPr>
+    </p:bg>
     <p:spTree>
       <p:nvGrpSpPr>
         <p:cNvPr id="1" name=""/>
@@ -3099,20 +3107,96 @@
       <p:grpSpPr/>
       <p:sp>
         <p:nvSpPr>
-          <p:cNvPr id="2" name="Title 1"/>
-          <p:cNvSpPr>
-            <a:spLocks noGrp="1"/>
-          </p:cNvSpPr>
-          <p:nvPr>
-            <p:ph type="ctrTitle"/>
-          </p:nvPr>
-        </p:nvSpPr>
-        <p:spPr/>
-        <p:txBody>
-          <a:bodyPr/>
-          <a:lstStyle/>
-          <a:p>
-            <a:r>
+          <p:cNvPr id="2" name="Rectangle 1"/>
+          <p:cNvSpPr/>
+          <p:nvPr/>
+        </p:nvSpPr>
+        <p:spPr>
+          <a:xfrm>
+            <a:off x="1600047" y="1676400"/>
+            <a:ext cx="9144000" cy="3657600"/>
+          </a:xfrm>
+          <a:prstGeom prst="rect">
+            <a:avLst/>
+          </a:prstGeom>
+          <a:solidFill>
+            <a:srgbClr val="000000"/>
+          </a:solidFill>
+          <a:ln>
+            <a:noFill/>
+          </a:ln>
+        </p:spPr>
+        <p:style>
+          <a:lnRef idx="1">
+            <a:schemeClr val="accent1"/>
+          </a:lnRef>
+          <a:fillRef idx="3">
+            <a:schemeClr val="accent1"/>
+          </a:fillRef>
+          <a:effectRef idx="2">
+            <a:schemeClr val="accent1"/>
+          </a:effectRef>
+          <a:fontRef idx="minor">
+            <a:schemeClr val="lt1"/>
+          </a:fontRef>
+        </p:style>
+        <p:txBody>
+          <a:bodyPr rtlCol="0" anchor="ctr"/>
+          <a:lstStyle/>
+          <a:p>
+            <a:pPr algn="ctr"/>
+          </a:p>
+        </p:txBody>
+      </p:sp>
+      <p:sp>
+        <p:nvSpPr>
+          <p:cNvPr id="3" name="Rectangle 2"/>
+          <p:cNvSpPr/>
+          <p:nvPr/>
+        </p:nvSpPr>
+        <p:spPr>
+          <a:xfrm>
+            <a:off x="1523847" y="1600200"/>
+            <a:ext cx="9144000" cy="3657600"/>
+          </a:xfrm>
+          <a:prstGeom prst="rect">
+            <a:avLst/>
+          </a:prstGeom>
+          <a:solidFill>
+            <a:srgbClr val="FFE600"/>
+          </a:solidFill>
+          <a:ln w="50800">
+            <a:solidFill>
+              <a:srgbClr val="000000"/>
+            </a:solidFill>
+          </a:ln>
+        </p:spPr>
+        <p:style>
+          <a:lnRef idx="1">
+            <a:schemeClr val="accent1"/>
+          </a:lnRef>
+          <a:fillRef idx="3">
+            <a:schemeClr val="accent1"/>
+          </a:fillRef>
+          <a:effectRef idx="2">
+            <a:schemeClr val="accent1"/>
+          </a:effectRef>
+          <a:fontRef idx="minor">
+            <a:schemeClr val="lt1"/>
+          </a:fontRef>
+        </p:style>
+        <p:txBody>
+          <a:bodyPr rtlCol="0" anchor="ctr"/>
+          <a:lstStyle/>
+          <a:p>
+            <a:pPr algn="ctr"/>
+            <a:r>
+              <a:rPr sz="8000" b="1">
+                <a:solidFill>
+                  <a:srgbClr val="000000"/>
+                </a:solidFill>
+                <a:latin typeface="Arial"/>
+              </a:rPr>
               <a:t>CodeLingo</a:t>
             </a:r>
           </a:p>
@@ -3120,26 +3204,98 @@
       </p:sp>
       <p:sp>
         <p:nvSpPr>
-          <p:cNvPr id="3" name="Subtitle 2"/>
-          <p:cNvSpPr>
-            <a:spLocks noGrp="1"/>
-          </p:cNvSpPr>
-          <p:nvPr>
-            <p:ph type="subTitle" idx="1"/>
-          </p:nvPr>
-        </p:nvSpPr>
-        <p:spPr/>
-        <p:txBody>
-          <a:bodyPr/>
-          <a:lstStyle/>
-          <a:p>
-            <a:r>
-              <a:t>Learn Code by Doing</a:t>
-            </a:r>
-          </a:p>
-          <a:p>
-            <a:r>
-              <a:t>Gamified. Interactive. AI-Powered.</a:t>
+          <p:cNvPr id="4" name="Rectangle 3"/>
+          <p:cNvSpPr/>
+          <p:nvPr/>
+        </p:nvSpPr>
+        <p:spPr>
+          <a:xfrm>
+            <a:off x="2514447" y="5791200"/>
+            <a:ext cx="7315200" cy="1371600"/>
+          </a:xfrm>
+          <a:prstGeom prst="rect">
+            <a:avLst/>
+          </a:prstGeom>
+          <a:solidFill>
+            <a:srgbClr val="000000"/>
+          </a:solidFill>
+          <a:ln>
+            <a:noFill/>
+          </a:ln>
+        </p:spPr>
+        <p:style>
+          <a:lnRef idx="1">
+            <a:schemeClr val="accent1"/>
+          </a:lnRef>
+          <a:fillRef idx="3">
+            <a:schemeClr val="accent1"/>
+          </a:fillRef>
+          <a:effectRef idx="2">
+            <a:schemeClr val="accent1"/>
+          </a:effectRef>
+          <a:fontRef idx="minor">
+            <a:schemeClr val="lt1"/>
+          </a:fontRef>
+        </p:style>
+        <p:txBody>
+          <a:bodyPr rtlCol="0" anchor="ctr"/>
+          <a:lstStyle/>
+          <a:p>
+            <a:pPr algn="ctr"/>
+          </a:p>
+        </p:txBody>
+      </p:sp>
+      <p:sp>
+        <p:nvSpPr>
+          <p:cNvPr id="5" name="Rectangle 4"/>
+          <p:cNvSpPr/>
+          <p:nvPr/>
+        </p:nvSpPr>
+        <p:spPr>
+          <a:xfrm>
+            <a:off x="2438247" y="5715000"/>
+            <a:ext cx="7315200" cy="1371600"/>
+          </a:xfrm>
+          <a:prstGeom prst="rect">
+            <a:avLst/>
+          </a:prstGeom>
+          <a:solidFill>
+            <a:srgbClr val="FFFFFF"/>
+          </a:solidFill>
+          <a:ln w="50800">
+            <a:solidFill>
+              <a:srgbClr val="000000"/>
+            </a:solidFill>
+          </a:ln>
+        </p:spPr>
+        <p:style>
+          <a:lnRef idx="1">
+            <a:schemeClr val="accent1"/>
+          </a:lnRef>
+          <a:fillRef idx="3">
+            <a:schemeClr val="accent1"/>
+          </a:fillRef>
+          <a:effectRef idx="2">
+            <a:schemeClr val="accent1"/>
+          </a:effectRef>
+          <a:fontRef idx="minor">
+            <a:schemeClr val="lt1"/>
+          </a:fontRef>
+        </p:style>
+        <p:txBody>
+          <a:bodyPr rtlCol="0" anchor="ctr"/>
+          <a:lstStyle/>
+          <a:p>
+            <a:pPr algn="ctr"/>
+            <a:r>
+              <a:rPr sz="2800" b="1">
+                <a:solidFill>
+                  <a:srgbClr val="000000"/>
+                </a:solidFill>
+                <a:latin typeface="Arial"/>
+              </a:rPr>
+              <a:t>Learn Coding by Doing.
+Interactive. Structured. Addictive.</a:t>
             </a:r>
           </a:p>
         </p:txBody>
@@ -3155,6 +3311,14 @@
 <file path=ppt/slides/slide10.xml><?xml version="1.0" encoding="utf-8"?>
 <p:sld xmlns:a="http://schemas.openxmlformats.org/drawingml/2006/main" xmlns:p="http://schemas.openxmlformats.org/presentationml/2006/main" xmlns:r="http://schemas.openxmlformats.org/officeDocument/2006/relationships">
   <p:cSld>
+    <p:bg>
+      <p:bgPr>
+        <a:solidFill>
+          <a:srgbClr val="F0F0F0"/>
+        </a:solidFill>
+        <a:effectLst/>
+      </p:bgPr>
+    </p:bg>
     <p:spTree>
       <p:nvGrpSpPr>
         <p:cNvPr id="1" name=""/>
@@ -3164,53 +3328,196 @@
       <p:grpSpPr/>
       <p:sp>
         <p:nvSpPr>
-          <p:cNvPr id="2" name="Title 1"/>
-          <p:cNvSpPr>
-            <a:spLocks noGrp="1"/>
-          </p:cNvSpPr>
-          <p:nvPr>
-            <p:ph type="ctrTitle"/>
-          </p:nvPr>
-        </p:nvSpPr>
-        <p:spPr/>
-        <p:txBody>
-          <a:bodyPr/>
-          <a:lstStyle/>
-          <a:p>
-            <a:r>
-              <a:t>Join the Revolution</a:t>
-            </a:r>
-          </a:p>
-        </p:txBody>
-      </p:sp>
-      <p:sp>
-        <p:nvSpPr>
-          <p:cNvPr id="3" name="Subtitle 2"/>
-          <p:cNvSpPr>
-            <a:spLocks noGrp="1"/>
-          </p:cNvSpPr>
-          <p:nvPr>
-            <p:ph type="subTitle" idx="1"/>
-          </p:nvPr>
-        </p:nvSpPr>
-        <p:spPr/>
-        <p:txBody>
-          <a:bodyPr/>
-          <a:lstStyle/>
-          <a:p>
-            <a:r>
-              <a:t>Let's fix the way the world learns to code.</a:t>
-            </a:r>
-          </a:p>
-          <a:p/>
-          <a:p>
-            <a:r>
-              <a:t>Contact: your@email.com</a:t>
-            </a:r>
-          </a:p>
-          <a:p>
-            <a:r>
-              <a:t>Website: codelingo.app</a:t>
+          <p:cNvPr id="2" name="Rectangle 1"/>
+          <p:cNvSpPr/>
+          <p:nvPr/>
+        </p:nvSpPr>
+        <p:spPr>
+          <a:xfrm>
+            <a:off x="1600047" y="1676400"/>
+            <a:ext cx="9144000" cy="3657600"/>
+          </a:xfrm>
+          <a:prstGeom prst="rect">
+            <a:avLst/>
+          </a:prstGeom>
+          <a:solidFill>
+            <a:srgbClr val="000000"/>
+          </a:solidFill>
+          <a:ln>
+            <a:noFill/>
+          </a:ln>
+        </p:spPr>
+        <p:style>
+          <a:lnRef idx="1">
+            <a:schemeClr val="accent1"/>
+          </a:lnRef>
+          <a:fillRef idx="3">
+            <a:schemeClr val="accent1"/>
+          </a:fillRef>
+          <a:effectRef idx="2">
+            <a:schemeClr val="accent1"/>
+          </a:effectRef>
+          <a:fontRef idx="minor">
+            <a:schemeClr val="lt1"/>
+          </a:fontRef>
+        </p:style>
+        <p:txBody>
+          <a:bodyPr rtlCol="0" anchor="ctr"/>
+          <a:lstStyle/>
+          <a:p>
+            <a:pPr algn="ctr"/>
+          </a:p>
+        </p:txBody>
+      </p:sp>
+      <p:sp>
+        <p:nvSpPr>
+          <p:cNvPr id="3" name="Rectangle 2"/>
+          <p:cNvSpPr/>
+          <p:nvPr/>
+        </p:nvSpPr>
+        <p:spPr>
+          <a:xfrm>
+            <a:off x="1523847" y="1600200"/>
+            <a:ext cx="9144000" cy="3657600"/>
+          </a:xfrm>
+          <a:prstGeom prst="rect">
+            <a:avLst/>
+          </a:prstGeom>
+          <a:solidFill>
+            <a:srgbClr val="FF00FF"/>
+          </a:solidFill>
+          <a:ln w="50800">
+            <a:solidFill>
+              <a:srgbClr val="000000"/>
+            </a:solidFill>
+          </a:ln>
+        </p:spPr>
+        <p:style>
+          <a:lnRef idx="1">
+            <a:schemeClr val="accent1"/>
+          </a:lnRef>
+          <a:fillRef idx="3">
+            <a:schemeClr val="accent1"/>
+          </a:fillRef>
+          <a:effectRef idx="2">
+            <a:schemeClr val="accent1"/>
+          </a:effectRef>
+          <a:fontRef idx="minor">
+            <a:schemeClr val="lt1"/>
+          </a:fontRef>
+        </p:style>
+        <p:txBody>
+          <a:bodyPr rtlCol="0" anchor="ctr"/>
+          <a:lstStyle/>
+          <a:p>
+            <a:pPr algn="ctr"/>
+            <a:r>
+              <a:rPr sz="8000" b="1">
+                <a:solidFill>
+                  <a:srgbClr val="000000"/>
+                </a:solidFill>
+                <a:latin typeface="Arial"/>
+              </a:rPr>
+              <a:t>Join CodeLingo</a:t>
+            </a:r>
+          </a:p>
+        </p:txBody>
+      </p:sp>
+      <p:sp>
+        <p:nvSpPr>
+          <p:cNvPr id="4" name="Rectangle 3"/>
+          <p:cNvSpPr/>
+          <p:nvPr/>
+        </p:nvSpPr>
+        <p:spPr>
+          <a:xfrm>
+            <a:off x="2514447" y="5791200"/>
+            <a:ext cx="7315200" cy="1371600"/>
+          </a:xfrm>
+          <a:prstGeom prst="rect">
+            <a:avLst/>
+          </a:prstGeom>
+          <a:solidFill>
+            <a:srgbClr val="000000"/>
+          </a:solidFill>
+          <a:ln>
+            <a:noFill/>
+          </a:ln>
+        </p:spPr>
+        <p:style>
+          <a:lnRef idx="1">
+            <a:schemeClr val="accent1"/>
+          </a:lnRef>
+          <a:fillRef idx="3">
+            <a:schemeClr val="accent1"/>
+          </a:fillRef>
+          <a:effectRef idx="2">
+            <a:schemeClr val="accent1"/>
+          </a:effectRef>
+          <a:fontRef idx="minor">
+            <a:schemeClr val="lt1"/>
+          </a:fontRef>
+        </p:style>
+        <p:txBody>
+          <a:bodyPr rtlCol="0" anchor="ctr"/>
+          <a:lstStyle/>
+          <a:p>
+            <a:pPr algn="ctr"/>
+          </a:p>
+        </p:txBody>
+      </p:sp>
+      <p:sp>
+        <p:nvSpPr>
+          <p:cNvPr id="5" name="Rectangle 4"/>
+          <p:cNvSpPr/>
+          <p:nvPr/>
+        </p:nvSpPr>
+        <p:spPr>
+          <a:xfrm>
+            <a:off x="2438247" y="5715000"/>
+            <a:ext cx="7315200" cy="1371600"/>
+          </a:xfrm>
+          <a:prstGeom prst="rect">
+            <a:avLst/>
+          </a:prstGeom>
+          <a:solidFill>
+            <a:srgbClr val="FFFFFF"/>
+          </a:solidFill>
+          <a:ln w="50800">
+            <a:solidFill>
+              <a:srgbClr val="000000"/>
+            </a:solidFill>
+          </a:ln>
+        </p:spPr>
+        <p:style>
+          <a:lnRef idx="1">
+            <a:schemeClr val="accent1"/>
+          </a:lnRef>
+          <a:fillRef idx="3">
+            <a:schemeClr val="accent1"/>
+          </a:fillRef>
+          <a:effectRef idx="2">
+            <a:schemeClr val="accent1"/>
+          </a:effectRef>
+          <a:fontRef idx="minor">
+            <a:schemeClr val="lt1"/>
+          </a:fontRef>
+        </p:style>
+        <p:txBody>
+          <a:bodyPr rtlCol="0" anchor="ctr"/>
+          <a:lstStyle/>
+          <a:p>
+            <a:pPr algn="ctr"/>
+            <a:r>
+              <a:rPr sz="2800" b="1">
+                <a:solidFill>
+                  <a:srgbClr val="000000"/>
+                </a:solidFill>
+                <a:latin typeface="Arial"/>
+              </a:rPr>
+              <a:t>Make coding simple.
+Make learning consistent.
+Make progress real.</a:t>
             </a:r>
           </a:p>
         </p:txBody>
@@ -3226,6 +3533,14 @@
 <file path=ppt/slides/slide2.xml><?xml version="1.0" encoding="utf-8"?>
 <p:sld xmlns:a="http://schemas.openxmlformats.org/drawingml/2006/main" xmlns:p="http://schemas.openxmlformats.org/presentationml/2006/main" xmlns:r="http://schemas.openxmlformats.org/officeDocument/2006/relationships">
   <p:cSld>
+    <p:bg>
+      <p:bgPr>
+        <a:solidFill>
+          <a:srgbClr val="F0F0F0"/>
+        </a:solidFill>
+        <a:effectLst/>
+      </p:bgPr>
+    </p:bg>
     <p:spTree>
       <p:nvGrpSpPr>
         <p:cNvPr id="1" name=""/>
@@ -3235,81 +3550,23 @@
       <p:grpSpPr/>
       <p:sp>
         <p:nvSpPr>
-          <p:cNvPr id="2" name="Title 1"/>
-          <p:cNvSpPr>
-            <a:spLocks noGrp="1"/>
-          </p:cNvSpPr>
-          <p:nvPr>
-            <p:ph type="title"/>
-          </p:nvPr>
-        </p:nvSpPr>
-        <p:spPr/>
-        <p:txBody>
-          <a:bodyPr/>
-          <a:lstStyle/>
-          <a:p>
-            <a:r>
-              <a:t>The Problem</a:t>
-            </a:r>
-          </a:p>
-        </p:txBody>
-      </p:sp>
-      <p:sp>
-        <p:nvSpPr>
-          <p:cNvPr id="3" name="Content Placeholder 2"/>
-          <p:cNvSpPr>
-            <a:spLocks noGrp="1"/>
-          </p:cNvSpPr>
-          <p:nvPr>
-            <p:ph idx="1"/>
-          </p:nvPr>
-        </p:nvSpPr>
-        <p:spPr/>
-        <p:txBody>
-          <a:bodyPr/>
-          <a:lstStyle/>
-          <a:p/>
-          <a:p>
-            <a:pPr/>
-            <a:r>
-              <a:t>Traditional coding education is static and boring.</a:t>
-            </a:r>
-          </a:p>
-          <a:p>
-            <a:pPr/>
-            <a:r>
-              <a:t>No immediate feedback loops for beginners.</a:t>
-            </a:r>
-          </a:p>
-          <a:p>
-            <a:pPr/>
-            <a:r>
-              <a:t>High barrier to entry leading to imposter syndrome.</a:t>
-            </a:r>
-          </a:p>
-        </p:txBody>
-      </p:sp>
-      <p:sp>
-        <p:nvSpPr>
-          <p:cNvPr id="4" name="Rectangle 3"/>
+          <p:cNvPr id="2" name="Rectangle 1"/>
           <p:cNvSpPr/>
           <p:nvPr/>
         </p:nvSpPr>
         <p:spPr>
           <a:xfrm>
-            <a:off x="5029200" y="1371600"/>
-            <a:ext cx="3200400" cy="4114800"/>
+            <a:off x="533400" y="533400"/>
+            <a:ext cx="5486400" cy="914400"/>
           </a:xfrm>
           <a:prstGeom prst="rect">
             <a:avLst/>
           </a:prstGeom>
           <a:solidFill>
-            <a:srgbClr val="F0F0F0"/>
-          </a:solidFill>
-          <a:ln w="25400">
-            <a:solidFill>
-              <a:srgbClr val="000000"/>
-            </a:solidFill>
+            <a:srgbClr val="000000"/>
+          </a:solidFill>
+          <a:ln>
+            <a:noFill/>
           </a:ln>
         </p:spPr>
         <p:style>
@@ -3336,29 +3593,292 @@
       </p:sp>
       <p:sp>
         <p:nvSpPr>
-          <p:cNvPr id="5" name="TextBox 4"/>
-          <p:cNvSpPr txBox="1"/>
+          <p:cNvPr id="3" name="Rectangle 2"/>
+          <p:cNvSpPr/>
           <p:nvPr/>
         </p:nvSpPr>
         <p:spPr>
           <a:xfrm>
-            <a:off x="5029200" y="2971800"/>
-            <a:ext cx="3200400" cy="914400"/>
+            <a:off x="457200" y="457200"/>
+            <a:ext cx="5486400" cy="914400"/>
           </a:xfrm>
           <a:prstGeom prst="rect">
             <a:avLst/>
           </a:prstGeom>
-          <a:noFill/>
-        </p:spPr>
-        <p:txBody>
-          <a:bodyPr wrap="none">
-            <a:spAutoFit/>
-          </a:bodyPr>
+          <a:solidFill>
+            <a:srgbClr val="FF00FF"/>
+          </a:solidFill>
+          <a:ln w="50800">
+            <a:solidFill>
+              <a:srgbClr val="000000"/>
+            </a:solidFill>
+          </a:ln>
+        </p:spPr>
+        <p:style>
+          <a:lnRef idx="1">
+            <a:schemeClr val="accent1"/>
+          </a:lnRef>
+          <a:fillRef idx="3">
+            <a:schemeClr val="accent1"/>
+          </a:fillRef>
+          <a:effectRef idx="2">
+            <a:schemeClr val="accent1"/>
+          </a:effectRef>
+          <a:fontRef idx="minor">
+            <a:schemeClr val="lt1"/>
+          </a:fontRef>
+        </p:style>
+        <p:txBody>
+          <a:bodyPr rtlCol="0" anchor="ctr"/>
+          <a:lstStyle/>
+          <a:p>
+            <a:pPr algn="l"/>
+            <a:r>
+              <a:rPr sz="4000" b="1">
+                <a:solidFill>
+                  <a:srgbClr val="000000"/>
+                </a:solidFill>
+                <a:latin typeface="Arial"/>
+              </a:rPr>
+              <a:t>The Problem</a:t>
+            </a:r>
+          </a:p>
+        </p:txBody>
+      </p:sp>
+      <p:sp>
+        <p:nvSpPr>
+          <p:cNvPr id="4" name="Rectangle 3"/>
+          <p:cNvSpPr/>
+          <p:nvPr/>
+        </p:nvSpPr>
+        <p:spPr>
+          <a:xfrm>
+            <a:off x="533400" y="1905000"/>
+            <a:ext cx="5029200" cy="4114800"/>
+          </a:xfrm>
+          <a:prstGeom prst="rect">
+            <a:avLst/>
+          </a:prstGeom>
+          <a:solidFill>
+            <a:srgbClr val="000000"/>
+          </a:solidFill>
+          <a:ln>
+            <a:noFill/>
+          </a:ln>
+        </p:spPr>
+        <p:style>
+          <a:lnRef idx="1">
+            <a:schemeClr val="accent1"/>
+          </a:lnRef>
+          <a:fillRef idx="3">
+            <a:schemeClr val="accent1"/>
+          </a:fillRef>
+          <a:effectRef idx="2">
+            <a:schemeClr val="accent1"/>
+          </a:effectRef>
+          <a:fontRef idx="minor">
+            <a:schemeClr val="lt1"/>
+          </a:fontRef>
+        </p:style>
+        <p:txBody>
+          <a:bodyPr rtlCol="0" anchor="ctr"/>
           <a:lstStyle/>
           <a:p>
             <a:pPr algn="ctr"/>
-            <a:r>
-              <a:t>[ Screenshot of a boring tutorial vs. a 'Game Over' screen ]</a:t>
+          </a:p>
+        </p:txBody>
+      </p:sp>
+      <p:sp>
+        <p:nvSpPr>
+          <p:cNvPr id="5" name="Rectangle 4"/>
+          <p:cNvSpPr/>
+          <p:nvPr/>
+        </p:nvSpPr>
+        <p:spPr>
+          <a:xfrm>
+            <a:off x="457200" y="1828800"/>
+            <a:ext cx="5029200" cy="4114800"/>
+          </a:xfrm>
+          <a:prstGeom prst="rect">
+            <a:avLst/>
+          </a:prstGeom>
+          <a:solidFill>
+            <a:srgbClr val="FFFFFF"/>
+          </a:solidFill>
+          <a:ln w="50800">
+            <a:solidFill>
+              <a:srgbClr val="000000"/>
+            </a:solidFill>
+          </a:ln>
+        </p:spPr>
+        <p:style>
+          <a:lnRef idx="1">
+            <a:schemeClr val="accent1"/>
+          </a:lnRef>
+          <a:fillRef idx="3">
+            <a:schemeClr val="accent1"/>
+          </a:fillRef>
+          <a:effectRef idx="2">
+            <a:schemeClr val="accent1"/>
+          </a:effectRef>
+          <a:fontRef idx="minor">
+            <a:schemeClr val="lt1"/>
+          </a:fontRef>
+        </p:style>
+        <p:txBody>
+          <a:bodyPr rtlCol="0" anchor="ctr"/>
+          <a:lstStyle/>
+          <a:p>
+            <a:pPr algn="ctr"/>
+          </a:p>
+          <a:p>
+            <a:pPr>
+              <a:spcBef>
+                <a:spcPts val="1200"/>
+              </a:spcBef>
+            </a:pPr>
+            <a:r>
+              <a:rPr sz="2400" b="1">
+                <a:latin typeface="Arial"/>
+              </a:rPr>
+              <a:t>- Learning coding feels overwhelming</a:t>
+            </a:r>
+          </a:p>
+          <a:p>
+            <a:pPr>
+              <a:spcBef>
+                <a:spcPts val="1200"/>
+              </a:spcBef>
+            </a:pPr>
+            <a:r>
+              <a:rPr sz="2400" b="1">
+                <a:latin typeface="Arial"/>
+              </a:rPr>
+              <a:t>- Passive tutorials don’t build real skill</a:t>
+            </a:r>
+          </a:p>
+          <a:p>
+            <a:pPr>
+              <a:spcBef>
+                <a:spcPts val="1200"/>
+              </a:spcBef>
+            </a:pPr>
+            <a:r>
+              <a:rPr sz="2400" b="1">
+                <a:latin typeface="Arial"/>
+              </a:rPr>
+              <a:t>- Beginners get no instant feedback</a:t>
+            </a:r>
+          </a:p>
+          <a:p>
+            <a:pPr>
+              <a:spcBef>
+                <a:spcPts val="1200"/>
+              </a:spcBef>
+            </a:pPr>
+            <a:r>
+              <a:rPr sz="2400" b="1">
+                <a:latin typeface="Arial"/>
+              </a:rPr>
+              <a:t>- Most users quit before building anything</a:t>
+            </a:r>
+          </a:p>
+        </p:txBody>
+      </p:sp>
+      <p:sp>
+        <p:nvSpPr>
+          <p:cNvPr id="6" name="Rectangle 5"/>
+          <p:cNvSpPr/>
+          <p:nvPr/>
+        </p:nvSpPr>
+        <p:spPr>
+          <a:xfrm>
+            <a:off x="6019800" y="1905000"/>
+            <a:ext cx="5486400" cy="4114800"/>
+          </a:xfrm>
+          <a:prstGeom prst="rect">
+            <a:avLst/>
+          </a:prstGeom>
+          <a:solidFill>
+            <a:srgbClr val="000000"/>
+          </a:solidFill>
+          <a:ln>
+            <a:noFill/>
+          </a:ln>
+        </p:spPr>
+        <p:style>
+          <a:lnRef idx="1">
+            <a:schemeClr val="accent1"/>
+          </a:lnRef>
+          <a:fillRef idx="3">
+            <a:schemeClr val="accent1"/>
+          </a:fillRef>
+          <a:effectRef idx="2">
+            <a:schemeClr val="accent1"/>
+          </a:effectRef>
+          <a:fontRef idx="minor">
+            <a:schemeClr val="lt1"/>
+          </a:fontRef>
+        </p:style>
+        <p:txBody>
+          <a:bodyPr rtlCol="0" anchor="ctr"/>
+          <a:lstStyle/>
+          <a:p>
+            <a:pPr algn="ctr"/>
+          </a:p>
+        </p:txBody>
+      </p:sp>
+      <p:sp>
+        <p:nvSpPr>
+          <p:cNvPr id="7" name="Rectangle 6"/>
+          <p:cNvSpPr/>
+          <p:nvPr/>
+        </p:nvSpPr>
+        <p:spPr>
+          <a:xfrm>
+            <a:off x="5943600" y="1828800"/>
+            <a:ext cx="5486400" cy="4114800"/>
+          </a:xfrm>
+          <a:prstGeom prst="rect">
+            <a:avLst/>
+          </a:prstGeom>
+          <a:solidFill>
+            <a:srgbClr val="FFFFFF"/>
+          </a:solidFill>
+          <a:ln w="50800">
+            <a:solidFill>
+              <a:srgbClr val="000000"/>
+            </a:solidFill>
+          </a:ln>
+        </p:spPr>
+        <p:style>
+          <a:lnRef idx="1">
+            <a:schemeClr val="accent1"/>
+          </a:lnRef>
+          <a:fillRef idx="3">
+            <a:schemeClr val="accent1"/>
+          </a:fillRef>
+          <a:effectRef idx="2">
+            <a:schemeClr val="accent1"/>
+          </a:effectRef>
+          <a:fontRef idx="minor">
+            <a:schemeClr val="lt1"/>
+          </a:fontRef>
+        </p:style>
+        <p:txBody>
+          <a:bodyPr rtlCol="0" anchor="ctr"/>
+          <a:lstStyle/>
+          <a:p>
+            <a:pPr algn="ctr"/>
+            <a:r>
+              <a:rPr sz="2400" b="1">
+                <a:solidFill>
+                  <a:srgbClr val="000000"/>
+                </a:solidFill>
+                <a:latin typeface="Arial"/>
+              </a:rPr>
+              <a:t>[ landing_screen.png ]
+Place screenshot in scripts/assets/</a:t>
             </a:r>
           </a:p>
         </p:txBody>
@@ -3374,6 +3894,14 @@
 <file path=ppt/slides/slide3.xml><?xml version="1.0" encoding="utf-8"?>
 <p:sld xmlns:a="http://schemas.openxmlformats.org/drawingml/2006/main" xmlns:p="http://schemas.openxmlformats.org/presentationml/2006/main" xmlns:r="http://schemas.openxmlformats.org/officeDocument/2006/relationships">
   <p:cSld>
+    <p:bg>
+      <p:bgPr>
+        <a:solidFill>
+          <a:srgbClr val="F0F0F0"/>
+        </a:solidFill>
+        <a:effectLst/>
+      </p:bgPr>
+    </p:bg>
     <p:spTree>
       <p:nvGrpSpPr>
         <p:cNvPr id="1" name=""/>
@@ -3383,87 +3911,23 @@
       <p:grpSpPr/>
       <p:sp>
         <p:nvSpPr>
-          <p:cNvPr id="2" name="Title 1"/>
-          <p:cNvSpPr>
-            <a:spLocks noGrp="1"/>
-          </p:cNvSpPr>
-          <p:nvPr>
-            <p:ph type="title"/>
-          </p:nvPr>
-        </p:nvSpPr>
-        <p:spPr/>
-        <p:txBody>
-          <a:bodyPr/>
-          <a:lstStyle/>
-          <a:p>
-            <a:r>
-              <a:t>The Solution: CodeLingo</a:t>
-            </a:r>
-          </a:p>
-        </p:txBody>
-      </p:sp>
-      <p:sp>
-        <p:nvSpPr>
-          <p:cNvPr id="3" name="Content Placeholder 2"/>
-          <p:cNvSpPr>
-            <a:spLocks noGrp="1"/>
-          </p:cNvSpPr>
-          <p:nvPr>
-            <p:ph idx="1"/>
-          </p:nvPr>
-        </p:nvSpPr>
-        <p:spPr/>
-        <p:txBody>
-          <a:bodyPr/>
-          <a:lstStyle/>
-          <a:p/>
-          <a:p>
-            <a:pPr/>
-            <a:r>
-              <a:t>The Duolingo for Developers.</a:t>
-            </a:r>
-          </a:p>
-          <a:p>
-            <a:pPr/>
-            <a:r>
-              <a:t>Gamified: Hearts, XP, Streaks, and Levels.</a:t>
-            </a:r>
-          </a:p>
-          <a:p>
-            <a:pPr/>
-            <a:r>
-              <a:t>Interactive: Stop watching, start typing.</a:t>
-            </a:r>
-          </a:p>
-          <a:p>
-            <a:pPr/>
-            <a:r>
-              <a:t>AI-Powered: Dynamic challenges that adapt to you.</a:t>
-            </a:r>
-          </a:p>
-        </p:txBody>
-      </p:sp>
-      <p:sp>
-        <p:nvSpPr>
-          <p:cNvPr id="4" name="Rectangle 3"/>
+          <p:cNvPr id="2" name="Rectangle 1"/>
           <p:cNvSpPr/>
           <p:nvPr/>
         </p:nvSpPr>
         <p:spPr>
           <a:xfrm>
-            <a:off x="5029200" y="1371600"/>
-            <a:ext cx="3200400" cy="4114800"/>
+            <a:off x="533400" y="533400"/>
+            <a:ext cx="5486400" cy="914400"/>
           </a:xfrm>
           <a:prstGeom prst="rect">
             <a:avLst/>
           </a:prstGeom>
           <a:solidFill>
-            <a:srgbClr val="F0F0F0"/>
-          </a:solidFill>
-          <a:ln w="25400">
-            <a:solidFill>
-              <a:srgbClr val="000000"/>
-            </a:solidFill>
+            <a:srgbClr val="000000"/>
+          </a:solidFill>
+          <a:ln>
+            <a:noFill/>
           </a:ln>
         </p:spPr>
         <p:style>
@@ -3490,29 +3954,292 @@
       </p:sp>
       <p:sp>
         <p:nvSpPr>
-          <p:cNvPr id="5" name="TextBox 4"/>
-          <p:cNvSpPr txBox="1"/>
+          <p:cNvPr id="3" name="Rectangle 2"/>
+          <p:cNvSpPr/>
           <p:nvPr/>
         </p:nvSpPr>
         <p:spPr>
           <a:xfrm>
-            <a:off x="5029200" y="2971800"/>
-            <a:ext cx="3200400" cy="914400"/>
+            <a:off x="457200" y="457200"/>
+            <a:ext cx="5486400" cy="914400"/>
           </a:xfrm>
           <a:prstGeom prst="rect">
             <a:avLst/>
           </a:prstGeom>
-          <a:noFill/>
-        </p:spPr>
-        <p:txBody>
-          <a:bodyPr wrap="none">
-            <a:spAutoFit/>
-          </a:bodyPr>
+          <a:solidFill>
+            <a:srgbClr val="00FFFF"/>
+          </a:solidFill>
+          <a:ln w="50800">
+            <a:solidFill>
+              <a:srgbClr val="000000"/>
+            </a:solidFill>
+          </a:ln>
+        </p:spPr>
+        <p:style>
+          <a:lnRef idx="1">
+            <a:schemeClr val="accent1"/>
+          </a:lnRef>
+          <a:fillRef idx="3">
+            <a:schemeClr val="accent1"/>
+          </a:fillRef>
+          <a:effectRef idx="2">
+            <a:schemeClr val="accent1"/>
+          </a:effectRef>
+          <a:fontRef idx="minor">
+            <a:schemeClr val="lt1"/>
+          </a:fontRef>
+        </p:style>
+        <p:txBody>
+          <a:bodyPr rtlCol="0" anchor="ctr"/>
+          <a:lstStyle/>
+          <a:p>
+            <a:pPr algn="l"/>
+            <a:r>
+              <a:rPr sz="4000" b="1">
+                <a:solidFill>
+                  <a:srgbClr val="000000"/>
+                </a:solidFill>
+                <a:latin typeface="Arial"/>
+              </a:rPr>
+              <a:t>The Solution</a:t>
+            </a:r>
+          </a:p>
+        </p:txBody>
+      </p:sp>
+      <p:sp>
+        <p:nvSpPr>
+          <p:cNvPr id="4" name="Rectangle 3"/>
+          <p:cNvSpPr/>
+          <p:nvPr/>
+        </p:nvSpPr>
+        <p:spPr>
+          <a:xfrm>
+            <a:off x="533400" y="1905000"/>
+            <a:ext cx="5029200" cy="4114800"/>
+          </a:xfrm>
+          <a:prstGeom prst="rect">
+            <a:avLst/>
+          </a:prstGeom>
+          <a:solidFill>
+            <a:srgbClr val="000000"/>
+          </a:solidFill>
+          <a:ln>
+            <a:noFill/>
+          </a:ln>
+        </p:spPr>
+        <p:style>
+          <a:lnRef idx="1">
+            <a:schemeClr val="accent1"/>
+          </a:lnRef>
+          <a:fillRef idx="3">
+            <a:schemeClr val="accent1"/>
+          </a:fillRef>
+          <a:effectRef idx="2">
+            <a:schemeClr val="accent1"/>
+          </a:effectRef>
+          <a:fontRef idx="minor">
+            <a:schemeClr val="lt1"/>
+          </a:fontRef>
+        </p:style>
+        <p:txBody>
+          <a:bodyPr rtlCol="0" anchor="ctr"/>
           <a:lstStyle/>
           <a:p>
             <a:pPr algn="ctr"/>
-            <a:r>
-              <a:t>[ Collage of Map and Challenge screens ]</a:t>
+          </a:p>
+        </p:txBody>
+      </p:sp>
+      <p:sp>
+        <p:nvSpPr>
+          <p:cNvPr id="5" name="Rectangle 4"/>
+          <p:cNvSpPr/>
+          <p:nvPr/>
+        </p:nvSpPr>
+        <p:spPr>
+          <a:xfrm>
+            <a:off x="457200" y="1828800"/>
+            <a:ext cx="5029200" cy="4114800"/>
+          </a:xfrm>
+          <a:prstGeom prst="rect">
+            <a:avLst/>
+          </a:prstGeom>
+          <a:solidFill>
+            <a:srgbClr val="FFFFFF"/>
+          </a:solidFill>
+          <a:ln w="50800">
+            <a:solidFill>
+              <a:srgbClr val="000000"/>
+            </a:solidFill>
+          </a:ln>
+        </p:spPr>
+        <p:style>
+          <a:lnRef idx="1">
+            <a:schemeClr val="accent1"/>
+          </a:lnRef>
+          <a:fillRef idx="3">
+            <a:schemeClr val="accent1"/>
+          </a:fillRef>
+          <a:effectRef idx="2">
+            <a:schemeClr val="accent1"/>
+          </a:effectRef>
+          <a:fontRef idx="minor">
+            <a:schemeClr val="lt1"/>
+          </a:fontRef>
+        </p:style>
+        <p:txBody>
+          <a:bodyPr rtlCol="0" anchor="ctr"/>
+          <a:lstStyle/>
+          <a:p>
+            <a:pPr algn="ctr"/>
+          </a:p>
+          <a:p>
+            <a:pPr>
+              <a:spcBef>
+                <a:spcPts val="1200"/>
+              </a:spcBef>
+            </a:pPr>
+            <a:r>
+              <a:rPr sz="2400" b="1">
+                <a:latin typeface="Arial"/>
+              </a:rPr>
+              <a:t>- Gamified learning experience</a:t>
+            </a:r>
+          </a:p>
+          <a:p>
+            <a:pPr>
+              <a:spcBef>
+                <a:spcPts val="1200"/>
+              </a:spcBef>
+            </a:pPr>
+            <a:r>
+              <a:rPr sz="2400" b="1">
+                <a:latin typeface="Arial"/>
+              </a:rPr>
+              <a:t>- Hands-on interactive challenges</a:t>
+            </a:r>
+          </a:p>
+          <a:p>
+            <a:pPr>
+              <a:spcBef>
+                <a:spcPts val="1200"/>
+              </a:spcBef>
+            </a:pPr>
+            <a:r>
+              <a:rPr sz="2400" b="1">
+                <a:latin typeface="Arial"/>
+              </a:rPr>
+              <a:t>- Instant feedback on every step</a:t>
+            </a:r>
+          </a:p>
+          <a:p>
+            <a:pPr>
+              <a:spcBef>
+                <a:spcPts val="1200"/>
+              </a:spcBef>
+            </a:pPr>
+            <a:r>
+              <a:rPr sz="2400" b="1">
+                <a:latin typeface="Arial"/>
+              </a:rPr>
+              <a:t>- Start coding with zero setup</a:t>
+            </a:r>
+          </a:p>
+        </p:txBody>
+      </p:sp>
+      <p:sp>
+        <p:nvSpPr>
+          <p:cNvPr id="6" name="Rectangle 5"/>
+          <p:cNvSpPr/>
+          <p:nvPr/>
+        </p:nvSpPr>
+        <p:spPr>
+          <a:xfrm>
+            <a:off x="6019800" y="1905000"/>
+            <a:ext cx="5486400" cy="4114800"/>
+          </a:xfrm>
+          <a:prstGeom prst="rect">
+            <a:avLst/>
+          </a:prstGeom>
+          <a:solidFill>
+            <a:srgbClr val="000000"/>
+          </a:solidFill>
+          <a:ln>
+            <a:noFill/>
+          </a:ln>
+        </p:spPr>
+        <p:style>
+          <a:lnRef idx="1">
+            <a:schemeClr val="accent1"/>
+          </a:lnRef>
+          <a:fillRef idx="3">
+            <a:schemeClr val="accent1"/>
+          </a:fillRef>
+          <a:effectRef idx="2">
+            <a:schemeClr val="accent1"/>
+          </a:effectRef>
+          <a:fontRef idx="minor">
+            <a:schemeClr val="lt1"/>
+          </a:fontRef>
+        </p:style>
+        <p:txBody>
+          <a:bodyPr rtlCol="0" anchor="ctr"/>
+          <a:lstStyle/>
+          <a:p>
+            <a:pPr algn="ctr"/>
+          </a:p>
+        </p:txBody>
+      </p:sp>
+      <p:sp>
+        <p:nvSpPr>
+          <p:cNvPr id="7" name="Rectangle 6"/>
+          <p:cNvSpPr/>
+          <p:nvPr/>
+        </p:nvSpPr>
+        <p:spPr>
+          <a:xfrm>
+            <a:off x="5943600" y="1828800"/>
+            <a:ext cx="5486400" cy="4114800"/>
+          </a:xfrm>
+          <a:prstGeom prst="rect">
+            <a:avLst/>
+          </a:prstGeom>
+          <a:solidFill>
+            <a:srgbClr val="FFFFFF"/>
+          </a:solidFill>
+          <a:ln w="50800">
+            <a:solidFill>
+              <a:srgbClr val="000000"/>
+            </a:solidFill>
+          </a:ln>
+        </p:spPr>
+        <p:style>
+          <a:lnRef idx="1">
+            <a:schemeClr val="accent1"/>
+          </a:lnRef>
+          <a:fillRef idx="3">
+            <a:schemeClr val="accent1"/>
+          </a:fillRef>
+          <a:effectRef idx="2">
+            <a:schemeClr val="accent1"/>
+          </a:effectRef>
+          <a:fontRef idx="minor">
+            <a:schemeClr val="lt1"/>
+          </a:fontRef>
+        </p:style>
+        <p:txBody>
+          <a:bodyPr rtlCol="0" anchor="ctr"/>
+          <a:lstStyle/>
+          <a:p>
+            <a:pPr algn="ctr"/>
+            <a:r>
+              <a:rPr sz="2400" b="1">
+                <a:solidFill>
+                  <a:srgbClr val="000000"/>
+                </a:solidFill>
+                <a:latin typeface="Arial"/>
+              </a:rPr>
+              <a:t>[ map_screen.png ]
+Place screenshot in scripts/assets/</a:t>
             </a:r>
           </a:p>
         </p:txBody>
@@ -3528,6 +4255,14 @@
 <file path=ppt/slides/slide4.xml><?xml version="1.0" encoding="utf-8"?>
 <p:sld xmlns:a="http://schemas.openxmlformats.org/drawingml/2006/main" xmlns:p="http://schemas.openxmlformats.org/presentationml/2006/main" xmlns:r="http://schemas.openxmlformats.org/officeDocument/2006/relationships">
   <p:cSld>
+    <p:bg>
+      <p:bgPr>
+        <a:solidFill>
+          <a:srgbClr val="F0F0F0"/>
+        </a:solidFill>
+        <a:effectLst/>
+      </p:bgPr>
+    </p:bg>
     <p:spTree>
       <p:nvGrpSpPr>
         <p:cNvPr id="1" name=""/>
@@ -3537,81 +4272,23 @@
       <p:grpSpPr/>
       <p:sp>
         <p:nvSpPr>
-          <p:cNvPr id="2" name="Title 1"/>
-          <p:cNvSpPr>
-            <a:spLocks noGrp="1"/>
-          </p:cNvSpPr>
-          <p:nvPr>
-            <p:ph type="title"/>
-          </p:nvPr>
-        </p:nvSpPr>
-        <p:spPr/>
-        <p:txBody>
-          <a:bodyPr/>
-          <a:lstStyle/>
-          <a:p>
-            <a:r>
-              <a:t>A Structured Roadmap</a:t>
-            </a:r>
-          </a:p>
-        </p:txBody>
-      </p:sp>
-      <p:sp>
-        <p:nvSpPr>
-          <p:cNvPr id="3" name="Content Placeholder 2"/>
-          <p:cNvSpPr>
-            <a:spLocks noGrp="1"/>
-          </p:cNvSpPr>
-          <p:nvPr>
-            <p:ph idx="1"/>
-          </p:nvPr>
-        </p:nvSpPr>
-        <p:spPr/>
-        <p:txBody>
-          <a:bodyPr/>
-          <a:lstStyle/>
-          <a:p/>
-          <a:p>
-            <a:pPr/>
-            <a:r>
-              <a:t>Visual Skill Tree roadmap.</a:t>
-            </a:r>
-          </a:p>
-          <a:p>
-            <a:pPr/>
-            <a:r>
-              <a:t>Unlockable nodes for Python, JavaScript, and more.</a:t>
-            </a:r>
-          </a:p>
-          <a:p>
-            <a:pPr/>
-            <a:r>
-              <a:t>Progress tracking at every step.</a:t>
-            </a:r>
-          </a:p>
-        </p:txBody>
-      </p:sp>
-      <p:sp>
-        <p:nvSpPr>
-          <p:cNvPr id="4" name="Rectangle 3"/>
+          <p:cNvPr id="2" name="Rectangle 1"/>
           <p:cNvSpPr/>
           <p:nvPr/>
         </p:nvSpPr>
         <p:spPr>
           <a:xfrm>
-            <a:off x="5029200" y="1371600"/>
-            <a:ext cx="3200400" cy="4114800"/>
+            <a:off x="533400" y="533400"/>
+            <a:ext cx="5486400" cy="914400"/>
           </a:xfrm>
           <a:prstGeom prst="rect">
             <a:avLst/>
           </a:prstGeom>
           <a:solidFill>
-            <a:srgbClr val="F0F0F0"/>
-          </a:solidFill>
-          <a:ln w="25400">
-            <a:solidFill>
-              <a:srgbClr val="000000"/>
-            </a:solidFill>
+            <a:srgbClr val="000000"/>
+          </a:solidFill>
+          <a:ln>
+            <a:noFill/>
           </a:ln>
         </p:spPr>
         <p:style>
@@ -3638,29 +4315,292 @@
       </p:sp>
       <p:sp>
         <p:nvSpPr>
-          <p:cNvPr id="5" name="TextBox 4"/>
-          <p:cNvSpPr txBox="1"/>
+          <p:cNvPr id="3" name="Rectangle 2"/>
+          <p:cNvSpPr/>
           <p:nvPr/>
         </p:nvSpPr>
         <p:spPr>
           <a:xfrm>
-            <a:off x="5029200" y="2971800"/>
-            <a:ext cx="3200400" cy="914400"/>
+            <a:off x="457200" y="457200"/>
+            <a:ext cx="5486400" cy="914400"/>
           </a:xfrm>
           <a:prstGeom prst="rect">
             <a:avLst/>
           </a:prstGeom>
-          <a:noFill/>
-        </p:spPr>
-        <p:txBody>
-          <a:bodyPr wrap="none">
-            <a:spAutoFit/>
-          </a:bodyPr>
+          <a:solidFill>
+            <a:srgbClr val="FFE600"/>
+          </a:solidFill>
+          <a:ln w="50800">
+            <a:solidFill>
+              <a:srgbClr val="000000"/>
+            </a:solidFill>
+          </a:ln>
+        </p:spPr>
+        <p:style>
+          <a:lnRef idx="1">
+            <a:schemeClr val="accent1"/>
+          </a:lnRef>
+          <a:fillRef idx="3">
+            <a:schemeClr val="accent1"/>
+          </a:fillRef>
+          <a:effectRef idx="2">
+            <a:schemeClr val="accent1"/>
+          </a:effectRef>
+          <a:fontRef idx="minor">
+            <a:schemeClr val="lt1"/>
+          </a:fontRef>
+        </p:style>
+        <p:txBody>
+          <a:bodyPr rtlCol="0" anchor="ctr"/>
+          <a:lstStyle/>
+          <a:p>
+            <a:pPr algn="l"/>
+            <a:r>
+              <a:rPr sz="4000" b="1">
+                <a:solidFill>
+                  <a:srgbClr val="000000"/>
+                </a:solidFill>
+                <a:latin typeface="Arial"/>
+              </a:rPr>
+              <a:t>The Core Loop</a:t>
+            </a:r>
+          </a:p>
+        </p:txBody>
+      </p:sp>
+      <p:sp>
+        <p:nvSpPr>
+          <p:cNvPr id="4" name="Rectangle 3"/>
+          <p:cNvSpPr/>
+          <p:nvPr/>
+        </p:nvSpPr>
+        <p:spPr>
+          <a:xfrm>
+            <a:off x="533400" y="1905000"/>
+            <a:ext cx="5029200" cy="4114800"/>
+          </a:xfrm>
+          <a:prstGeom prst="rect">
+            <a:avLst/>
+          </a:prstGeom>
+          <a:solidFill>
+            <a:srgbClr val="000000"/>
+          </a:solidFill>
+          <a:ln>
+            <a:noFill/>
+          </a:ln>
+        </p:spPr>
+        <p:style>
+          <a:lnRef idx="1">
+            <a:schemeClr val="accent1"/>
+          </a:lnRef>
+          <a:fillRef idx="3">
+            <a:schemeClr val="accent1"/>
+          </a:fillRef>
+          <a:effectRef idx="2">
+            <a:schemeClr val="accent1"/>
+          </a:effectRef>
+          <a:fontRef idx="minor">
+            <a:schemeClr val="lt1"/>
+          </a:fontRef>
+        </p:style>
+        <p:txBody>
+          <a:bodyPr rtlCol="0" anchor="ctr"/>
           <a:lstStyle/>
           <a:p>
             <a:pPr algn="ctr"/>
-            <a:r>
-              <a:t>[ Screenshot of the Skill Tree Map (/map) ]</a:t>
+          </a:p>
+        </p:txBody>
+      </p:sp>
+      <p:sp>
+        <p:nvSpPr>
+          <p:cNvPr id="5" name="Rectangle 4"/>
+          <p:cNvSpPr/>
+          <p:nvPr/>
+        </p:nvSpPr>
+        <p:spPr>
+          <a:xfrm>
+            <a:off x="457200" y="1828800"/>
+            <a:ext cx="5029200" cy="4114800"/>
+          </a:xfrm>
+          <a:prstGeom prst="rect">
+            <a:avLst/>
+          </a:prstGeom>
+          <a:solidFill>
+            <a:srgbClr val="FFFFFF"/>
+          </a:solidFill>
+          <a:ln w="50800">
+            <a:solidFill>
+              <a:srgbClr val="000000"/>
+            </a:solidFill>
+          </a:ln>
+        </p:spPr>
+        <p:style>
+          <a:lnRef idx="1">
+            <a:schemeClr val="accent1"/>
+          </a:lnRef>
+          <a:fillRef idx="3">
+            <a:schemeClr val="accent1"/>
+          </a:fillRef>
+          <a:effectRef idx="2">
+            <a:schemeClr val="accent1"/>
+          </a:effectRef>
+          <a:fontRef idx="minor">
+            <a:schemeClr val="lt1"/>
+          </a:fontRef>
+        </p:style>
+        <p:txBody>
+          <a:bodyPr rtlCol="0" anchor="ctr"/>
+          <a:lstStyle/>
+          <a:p>
+            <a:pPr algn="ctr"/>
+          </a:p>
+          <a:p>
+            <a:pPr>
+              <a:spcBef>
+                <a:spcPts val="1200"/>
+              </a:spcBef>
+            </a:pPr>
+            <a:r>
+              <a:rPr sz="2400" b="1">
+                <a:latin typeface="Arial"/>
+              </a:rPr>
+              <a:t>- Health: Mistakes have impact</a:t>
+            </a:r>
+          </a:p>
+          <a:p>
+            <a:pPr>
+              <a:spcBef>
+                <a:spcPts val="1200"/>
+              </a:spcBef>
+            </a:pPr>
+            <a:r>
+              <a:rPr sz="2400" b="1">
+                <a:latin typeface="Arial"/>
+              </a:rPr>
+              <a:t>- Streaks: Build daily consistency</a:t>
+            </a:r>
+          </a:p>
+          <a:p>
+            <a:pPr>
+              <a:spcBef>
+                <a:spcPts val="1200"/>
+              </a:spcBef>
+            </a:pPr>
+            <a:r>
+              <a:rPr sz="2400" b="1">
+                <a:latin typeface="Arial"/>
+              </a:rPr>
+              <a:t>- XP: Track your progress</a:t>
+            </a:r>
+          </a:p>
+          <a:p>
+            <a:pPr>
+              <a:spcBef>
+                <a:spcPts val="1200"/>
+              </a:spcBef>
+            </a:pPr>
+            <a:r>
+              <a:rPr sz="2400" b="1">
+                <a:latin typeface="Arial"/>
+              </a:rPr>
+              <a:t>- Leagues: Stay motivated with competition</a:t>
+            </a:r>
+          </a:p>
+        </p:txBody>
+      </p:sp>
+      <p:sp>
+        <p:nvSpPr>
+          <p:cNvPr id="6" name="Rectangle 5"/>
+          <p:cNvSpPr/>
+          <p:nvPr/>
+        </p:nvSpPr>
+        <p:spPr>
+          <a:xfrm>
+            <a:off x="6019800" y="1905000"/>
+            <a:ext cx="5486400" cy="4114800"/>
+          </a:xfrm>
+          <a:prstGeom prst="rect">
+            <a:avLst/>
+          </a:prstGeom>
+          <a:solidFill>
+            <a:srgbClr val="000000"/>
+          </a:solidFill>
+          <a:ln>
+            <a:noFill/>
+          </a:ln>
+        </p:spPr>
+        <p:style>
+          <a:lnRef idx="1">
+            <a:schemeClr val="accent1"/>
+          </a:lnRef>
+          <a:fillRef idx="3">
+            <a:schemeClr val="accent1"/>
+          </a:fillRef>
+          <a:effectRef idx="2">
+            <a:schemeClr val="accent1"/>
+          </a:effectRef>
+          <a:fontRef idx="minor">
+            <a:schemeClr val="lt1"/>
+          </a:fontRef>
+        </p:style>
+        <p:txBody>
+          <a:bodyPr rtlCol="0" anchor="ctr"/>
+          <a:lstStyle/>
+          <a:p>
+            <a:pPr algn="ctr"/>
+          </a:p>
+        </p:txBody>
+      </p:sp>
+      <p:sp>
+        <p:nvSpPr>
+          <p:cNvPr id="7" name="Rectangle 6"/>
+          <p:cNvSpPr/>
+          <p:nvPr/>
+        </p:nvSpPr>
+        <p:spPr>
+          <a:xfrm>
+            <a:off x="5943600" y="1828800"/>
+            <a:ext cx="5486400" cy="4114800"/>
+          </a:xfrm>
+          <a:prstGeom prst="rect">
+            <a:avLst/>
+          </a:prstGeom>
+          <a:solidFill>
+            <a:srgbClr val="FFFFFF"/>
+          </a:solidFill>
+          <a:ln w="50800">
+            <a:solidFill>
+              <a:srgbClr val="000000"/>
+            </a:solidFill>
+          </a:ln>
+        </p:spPr>
+        <p:style>
+          <a:lnRef idx="1">
+            <a:schemeClr val="accent1"/>
+          </a:lnRef>
+          <a:fillRef idx="3">
+            <a:schemeClr val="accent1"/>
+          </a:fillRef>
+          <a:effectRef idx="2">
+            <a:schemeClr val="accent1"/>
+          </a:effectRef>
+          <a:fontRef idx="minor">
+            <a:schemeClr val="lt1"/>
+          </a:fontRef>
+        </p:style>
+        <p:txBody>
+          <a:bodyPr rtlCol="0" anchor="ctr"/>
+          <a:lstStyle/>
+          <a:p>
+            <a:pPr algn="ctr"/>
+            <a:r>
+              <a:rPr sz="2400" b="1">
+                <a:solidFill>
+                  <a:srgbClr val="000000"/>
+                </a:solidFill>
+                <a:latin typeface="Arial"/>
+              </a:rPr>
+              <a:t>[ profile_screen.png ]
+Place screenshot in scripts/assets/</a:t>
             </a:r>
           </a:p>
         </p:txBody>
@@ -3676,6 +4616,14 @@
 <file path=ppt/slides/slide5.xml><?xml version="1.0" encoding="utf-8"?>
 <p:sld xmlns:a="http://schemas.openxmlformats.org/drawingml/2006/main" xmlns:p="http://schemas.openxmlformats.org/presentationml/2006/main" xmlns:r="http://schemas.openxmlformats.org/officeDocument/2006/relationships">
   <p:cSld>
+    <p:bg>
+      <p:bgPr>
+        <a:solidFill>
+          <a:srgbClr val="F0F0F0"/>
+        </a:solidFill>
+        <a:effectLst/>
+      </p:bgPr>
+    </p:bg>
     <p:spTree>
       <p:nvGrpSpPr>
         <p:cNvPr id="1" name=""/>
@@ -3685,81 +4633,23 @@
       <p:grpSpPr/>
       <p:sp>
         <p:nvSpPr>
-          <p:cNvPr id="2" name="Title 1"/>
-          <p:cNvSpPr>
-            <a:spLocks noGrp="1"/>
-          </p:cNvSpPr>
-          <p:nvPr>
-            <p:ph type="title"/>
-          </p:nvPr>
-        </p:nvSpPr>
-        <p:spPr/>
-        <p:txBody>
-          <a:bodyPr/>
-          <a:lstStyle/>
-          <a:p>
-            <a:r>
-              <a:t>Multi-Modal Learning</a:t>
-            </a:r>
-          </a:p>
-        </p:txBody>
-      </p:sp>
-      <p:sp>
-        <p:nvSpPr>
-          <p:cNvPr id="3" name="Content Placeholder 2"/>
-          <p:cNvSpPr>
-            <a:spLocks noGrp="1"/>
-          </p:cNvSpPr>
-          <p:nvPr>
-            <p:ph idx="1"/>
-          </p:nvPr>
-        </p:nvSpPr>
-        <p:spPr/>
-        <p:txBody>
-          <a:bodyPr/>
-          <a:lstStyle/>
-          <a:p/>
-          <a:p>
-            <a:pPr/>
-            <a:r>
-              <a:t>Predict Output: Logic comprehension challenges.</a:t>
-            </a:r>
-          </a:p>
-          <a:p>
-            <a:pPr/>
-            <a:r>
-              <a:t>Drag &amp; Drop: Visual syntax building.</a:t>
-            </a:r>
-          </a:p>
-          <a:p>
-            <a:pPr/>
-            <a:r>
-              <a:t>AI Refactor: Real-world editing with AI evaluation.</a:t>
-            </a:r>
-          </a:p>
-        </p:txBody>
-      </p:sp>
-      <p:sp>
-        <p:nvSpPr>
-          <p:cNvPr id="4" name="Rectangle 3"/>
+          <p:cNvPr id="2" name="Rectangle 1"/>
           <p:cNvSpPr/>
           <p:nvPr/>
         </p:nvSpPr>
         <p:spPr>
           <a:xfrm>
-            <a:off x="5029200" y="1371600"/>
-            <a:ext cx="3200400" cy="4114800"/>
+            <a:off x="533400" y="533400"/>
+            <a:ext cx="5486400" cy="914400"/>
           </a:xfrm>
           <a:prstGeom prst="rect">
             <a:avLst/>
           </a:prstGeom>
           <a:solidFill>
-            <a:srgbClr val="F0F0F0"/>
-          </a:solidFill>
-          <a:ln w="25400">
-            <a:solidFill>
-              <a:srgbClr val="000000"/>
-            </a:solidFill>
+            <a:srgbClr val="000000"/>
+          </a:solidFill>
+          <a:ln>
+            <a:noFill/>
           </a:ln>
         </p:spPr>
         <p:style>
@@ -3786,29 +4676,292 @@
       </p:sp>
       <p:sp>
         <p:nvSpPr>
-          <p:cNvPr id="5" name="TextBox 4"/>
-          <p:cNvSpPr txBox="1"/>
+          <p:cNvPr id="3" name="Rectangle 2"/>
+          <p:cNvSpPr/>
           <p:nvPr/>
         </p:nvSpPr>
         <p:spPr>
           <a:xfrm>
-            <a:off x="5029200" y="2971800"/>
-            <a:ext cx="3200400" cy="914400"/>
+            <a:off x="457200" y="457200"/>
+            <a:ext cx="5486400" cy="914400"/>
           </a:xfrm>
           <a:prstGeom prst="rect">
             <a:avLst/>
           </a:prstGeom>
-          <a:noFill/>
-        </p:spPr>
-        <p:txBody>
-          <a:bodyPr wrap="none">
-            <a:spAutoFit/>
-          </a:bodyPr>
+          <a:solidFill>
+            <a:srgbClr val="FFFFFF"/>
+          </a:solidFill>
+          <a:ln w="50800">
+            <a:solidFill>
+              <a:srgbClr val="000000"/>
+            </a:solidFill>
+          </a:ln>
+        </p:spPr>
+        <p:style>
+          <a:lnRef idx="1">
+            <a:schemeClr val="accent1"/>
+          </a:lnRef>
+          <a:fillRef idx="3">
+            <a:schemeClr val="accent1"/>
+          </a:fillRef>
+          <a:effectRef idx="2">
+            <a:schemeClr val="accent1"/>
+          </a:effectRef>
+          <a:fontRef idx="minor">
+            <a:schemeClr val="lt1"/>
+          </a:fontRef>
+        </p:style>
+        <p:txBody>
+          <a:bodyPr rtlCol="0" anchor="ctr"/>
+          <a:lstStyle/>
+          <a:p>
+            <a:pPr algn="l"/>
+            <a:r>
+              <a:rPr sz="4000" b="1">
+                <a:solidFill>
+                  <a:srgbClr val="000000"/>
+                </a:solidFill>
+                <a:latin typeface="Arial"/>
+              </a:rPr>
+              <a:t>The Visual Roadmap</a:t>
+            </a:r>
+          </a:p>
+        </p:txBody>
+      </p:sp>
+      <p:sp>
+        <p:nvSpPr>
+          <p:cNvPr id="4" name="Rectangle 3"/>
+          <p:cNvSpPr/>
+          <p:nvPr/>
+        </p:nvSpPr>
+        <p:spPr>
+          <a:xfrm>
+            <a:off x="533400" y="1905000"/>
+            <a:ext cx="5029200" cy="4114800"/>
+          </a:xfrm>
+          <a:prstGeom prst="rect">
+            <a:avLst/>
+          </a:prstGeom>
+          <a:solidFill>
+            <a:srgbClr val="000000"/>
+          </a:solidFill>
+          <a:ln>
+            <a:noFill/>
+          </a:ln>
+        </p:spPr>
+        <p:style>
+          <a:lnRef idx="1">
+            <a:schemeClr val="accent1"/>
+          </a:lnRef>
+          <a:fillRef idx="3">
+            <a:schemeClr val="accent1"/>
+          </a:fillRef>
+          <a:effectRef idx="2">
+            <a:schemeClr val="accent1"/>
+          </a:effectRef>
+          <a:fontRef idx="minor">
+            <a:schemeClr val="lt1"/>
+          </a:fontRef>
+        </p:style>
+        <p:txBody>
+          <a:bodyPr rtlCol="0" anchor="ctr"/>
           <a:lstStyle/>
           <a:p>
             <a:pPr algn="ctr"/>
-            <a:r>
-              <a:t>[ Screenshot of the Challenge Editor (/challenge) ]</a:t>
+          </a:p>
+        </p:txBody>
+      </p:sp>
+      <p:sp>
+        <p:nvSpPr>
+          <p:cNvPr id="5" name="Rectangle 4"/>
+          <p:cNvSpPr/>
+          <p:nvPr/>
+        </p:nvSpPr>
+        <p:spPr>
+          <a:xfrm>
+            <a:off x="457200" y="1828800"/>
+            <a:ext cx="5029200" cy="4114800"/>
+          </a:xfrm>
+          <a:prstGeom prst="rect">
+            <a:avLst/>
+          </a:prstGeom>
+          <a:solidFill>
+            <a:srgbClr val="FFFFFF"/>
+          </a:solidFill>
+          <a:ln w="50800">
+            <a:solidFill>
+              <a:srgbClr val="000000"/>
+            </a:solidFill>
+          </a:ln>
+        </p:spPr>
+        <p:style>
+          <a:lnRef idx="1">
+            <a:schemeClr val="accent1"/>
+          </a:lnRef>
+          <a:fillRef idx="3">
+            <a:schemeClr val="accent1"/>
+          </a:fillRef>
+          <a:effectRef idx="2">
+            <a:schemeClr val="accent1"/>
+          </a:effectRef>
+          <a:fontRef idx="minor">
+            <a:schemeClr val="lt1"/>
+          </a:fontRef>
+        </p:style>
+        <p:txBody>
+          <a:bodyPr rtlCol="0" anchor="ctr"/>
+          <a:lstStyle/>
+          <a:p>
+            <a:pPr algn="ctr"/>
+          </a:p>
+          <a:p>
+            <a:pPr>
+              <a:spcBef>
+                <a:spcPts val="1200"/>
+              </a:spcBef>
+            </a:pPr>
+            <a:r>
+              <a:rPr sz="2400" b="1">
+                <a:latin typeface="Arial"/>
+              </a:rPr>
+              <a:t>- Clear skill progression path</a:t>
+            </a:r>
+          </a:p>
+          <a:p>
+            <a:pPr>
+              <a:spcBef>
+                <a:spcPts val="1200"/>
+              </a:spcBef>
+            </a:pPr>
+            <a:r>
+              <a:rPr sz="2400" b="1">
+                <a:latin typeface="Arial"/>
+              </a:rPr>
+              <a:t>- Structured learning journey</a:t>
+            </a:r>
+          </a:p>
+          <a:p>
+            <a:pPr>
+              <a:spcBef>
+                <a:spcPts val="1200"/>
+              </a:spcBef>
+            </a:pPr>
+            <a:r>
+              <a:rPr sz="2400" b="1">
+                <a:latin typeface="Arial"/>
+              </a:rPr>
+              <a:t>- Unlock new concepts step by step</a:t>
+            </a:r>
+          </a:p>
+          <a:p>
+            <a:pPr>
+              <a:spcBef>
+                <a:spcPts val="1200"/>
+              </a:spcBef>
+            </a:pPr>
+            <a:r>
+              <a:rPr sz="2400" b="1">
+                <a:latin typeface="Arial"/>
+              </a:rPr>
+              <a:t>- Designed to reach real-world readiness</a:t>
+            </a:r>
+          </a:p>
+        </p:txBody>
+      </p:sp>
+      <p:sp>
+        <p:nvSpPr>
+          <p:cNvPr id="6" name="Rectangle 5"/>
+          <p:cNvSpPr/>
+          <p:nvPr/>
+        </p:nvSpPr>
+        <p:spPr>
+          <a:xfrm>
+            <a:off x="6019800" y="1905000"/>
+            <a:ext cx="5486400" cy="4114800"/>
+          </a:xfrm>
+          <a:prstGeom prst="rect">
+            <a:avLst/>
+          </a:prstGeom>
+          <a:solidFill>
+            <a:srgbClr val="000000"/>
+          </a:solidFill>
+          <a:ln>
+            <a:noFill/>
+          </a:ln>
+        </p:spPr>
+        <p:style>
+          <a:lnRef idx="1">
+            <a:schemeClr val="accent1"/>
+          </a:lnRef>
+          <a:fillRef idx="3">
+            <a:schemeClr val="accent1"/>
+          </a:fillRef>
+          <a:effectRef idx="2">
+            <a:schemeClr val="accent1"/>
+          </a:effectRef>
+          <a:fontRef idx="minor">
+            <a:schemeClr val="lt1"/>
+          </a:fontRef>
+        </p:style>
+        <p:txBody>
+          <a:bodyPr rtlCol="0" anchor="ctr"/>
+          <a:lstStyle/>
+          <a:p>
+            <a:pPr algn="ctr"/>
+          </a:p>
+        </p:txBody>
+      </p:sp>
+      <p:sp>
+        <p:nvSpPr>
+          <p:cNvPr id="7" name="Rectangle 6"/>
+          <p:cNvSpPr/>
+          <p:nvPr/>
+        </p:nvSpPr>
+        <p:spPr>
+          <a:xfrm>
+            <a:off x="5943600" y="1828800"/>
+            <a:ext cx="5486400" cy="4114800"/>
+          </a:xfrm>
+          <a:prstGeom prst="rect">
+            <a:avLst/>
+          </a:prstGeom>
+          <a:solidFill>
+            <a:srgbClr val="FFFFFF"/>
+          </a:solidFill>
+          <a:ln w="50800">
+            <a:solidFill>
+              <a:srgbClr val="000000"/>
+            </a:solidFill>
+          </a:ln>
+        </p:spPr>
+        <p:style>
+          <a:lnRef idx="1">
+            <a:schemeClr val="accent1"/>
+          </a:lnRef>
+          <a:fillRef idx="3">
+            <a:schemeClr val="accent1"/>
+          </a:fillRef>
+          <a:effectRef idx="2">
+            <a:schemeClr val="accent1"/>
+          </a:effectRef>
+          <a:fontRef idx="minor">
+            <a:schemeClr val="lt1"/>
+          </a:fontRef>
+        </p:style>
+        <p:txBody>
+          <a:bodyPr rtlCol="0" anchor="ctr"/>
+          <a:lstStyle/>
+          <a:p>
+            <a:pPr algn="ctr"/>
+            <a:r>
+              <a:rPr sz="2400" b="1">
+                <a:solidFill>
+                  <a:srgbClr val="000000"/>
+                </a:solidFill>
+                <a:latin typeface="Arial"/>
+              </a:rPr>
+              <a:t>[ map_screen.png ]
+Place screenshot in scripts/assets/</a:t>
             </a:r>
           </a:p>
         </p:txBody>
@@ -3824,6 +4977,14 @@
 <file path=ppt/slides/slide6.xml><?xml version="1.0" encoding="utf-8"?>
 <p:sld xmlns:a="http://schemas.openxmlformats.org/drawingml/2006/main" xmlns:p="http://schemas.openxmlformats.org/presentationml/2006/main" xmlns:r="http://schemas.openxmlformats.org/officeDocument/2006/relationships">
   <p:cSld>
+    <p:bg>
+      <p:bgPr>
+        <a:solidFill>
+          <a:srgbClr val="F0F0F0"/>
+        </a:solidFill>
+        <a:effectLst/>
+      </p:bgPr>
+    </p:bg>
     <p:spTree>
       <p:nvGrpSpPr>
         <p:cNvPr id="1" name=""/>
@@ -3833,81 +4994,23 @@
       <p:grpSpPr/>
       <p:sp>
         <p:nvSpPr>
-          <p:cNvPr id="2" name="Title 1"/>
-          <p:cNvSpPr>
-            <a:spLocks noGrp="1"/>
-          </p:cNvSpPr>
-          <p:nvPr>
-            <p:ph type="title"/>
-          </p:nvPr>
-        </p:nvSpPr>
-        <p:spPr/>
-        <p:txBody>
-          <a:bodyPr/>
-          <a:lstStyle/>
-          <a:p>
-            <a:r>
-              <a:t>AI Integration (Gemini 2.0)</a:t>
-            </a:r>
-          </a:p>
-        </p:txBody>
-      </p:sp>
-      <p:sp>
-        <p:nvSpPr>
-          <p:cNvPr id="3" name="Content Placeholder 2"/>
-          <p:cNvSpPr>
-            <a:spLocks noGrp="1"/>
-          </p:cNvSpPr>
-          <p:nvPr>
-            <p:ph idx="1"/>
-          </p:nvPr>
-        </p:nvSpPr>
-        <p:spPr/>
-        <p:txBody>
-          <a:bodyPr/>
-          <a:lstStyle/>
-          <a:p/>
-          <a:p>
-            <a:pPr/>
-            <a:r>
-              <a:t>AI generates unique challenges on the fly.</a:t>
-            </a:r>
-          </a:p>
-          <a:p>
-            <a:pPr/>
-            <a:r>
-              <a:t>Intelligent grading with nuanced feedback.</a:t>
-            </a:r>
-          </a:p>
-          <a:p>
-            <a:pPr/>
-            <a:r>
-              <a:t>Personalized learning path based on performance.</a:t>
-            </a:r>
-          </a:p>
-        </p:txBody>
-      </p:sp>
-      <p:sp>
-        <p:nvSpPr>
-          <p:cNvPr id="4" name="Rectangle 3"/>
+          <p:cNvPr id="2" name="Rectangle 1"/>
           <p:cNvSpPr/>
           <p:nvPr/>
         </p:nvSpPr>
         <p:spPr>
           <a:xfrm>
-            <a:off x="5029200" y="1371600"/>
-            <a:ext cx="3200400" cy="4114800"/>
+            <a:off x="533400" y="533400"/>
+            <a:ext cx="5486400" cy="914400"/>
           </a:xfrm>
           <a:prstGeom prst="rect">
             <a:avLst/>
           </a:prstGeom>
           <a:solidFill>
-            <a:srgbClr val="F0F0F0"/>
-          </a:solidFill>
-          <a:ln w="25400">
-            <a:solidFill>
-              <a:srgbClr val="000000"/>
-            </a:solidFill>
+            <a:srgbClr val="000000"/>
+          </a:solidFill>
+          <a:ln>
+            <a:noFill/>
           </a:ln>
         </p:spPr>
         <p:style>
@@ -3934,29 +5037,292 @@
       </p:sp>
       <p:sp>
         <p:nvSpPr>
-          <p:cNvPr id="5" name="TextBox 4"/>
-          <p:cNvSpPr txBox="1"/>
+          <p:cNvPr id="3" name="Rectangle 2"/>
+          <p:cNvSpPr/>
           <p:nvPr/>
         </p:nvSpPr>
         <p:spPr>
           <a:xfrm>
-            <a:off x="5029200" y="2971800"/>
-            <a:ext cx="3200400" cy="914400"/>
+            <a:off x="457200" y="457200"/>
+            <a:ext cx="5486400" cy="914400"/>
           </a:xfrm>
           <a:prstGeom prst="rect">
             <a:avLst/>
           </a:prstGeom>
-          <a:noFill/>
-        </p:spPr>
-        <p:txBody>
-          <a:bodyPr wrap="none">
-            <a:spAutoFit/>
-          </a:bodyPr>
+          <a:solidFill>
+            <a:srgbClr val="FF00FF"/>
+          </a:solidFill>
+          <a:ln w="50800">
+            <a:solidFill>
+              <a:srgbClr val="000000"/>
+            </a:solidFill>
+          </a:ln>
+        </p:spPr>
+        <p:style>
+          <a:lnRef idx="1">
+            <a:schemeClr val="accent1"/>
+          </a:lnRef>
+          <a:fillRef idx="3">
+            <a:schemeClr val="accent1"/>
+          </a:fillRef>
+          <a:effectRef idx="2">
+            <a:schemeClr val="accent1"/>
+          </a:effectRef>
+          <a:fontRef idx="minor">
+            <a:schemeClr val="lt1"/>
+          </a:fontRef>
+        </p:style>
+        <p:txBody>
+          <a:bodyPr rtlCol="0" anchor="ctr"/>
+          <a:lstStyle/>
+          <a:p>
+            <a:pPr algn="l"/>
+            <a:r>
+              <a:rPr sz="4000" b="1">
+                <a:solidFill>
+                  <a:srgbClr val="000000"/>
+                </a:solidFill>
+                <a:latin typeface="Arial"/>
+              </a:rPr>
+              <a:t>Multi-Modal Learning</a:t>
+            </a:r>
+          </a:p>
+        </p:txBody>
+      </p:sp>
+      <p:sp>
+        <p:nvSpPr>
+          <p:cNvPr id="4" name="Rectangle 3"/>
+          <p:cNvSpPr/>
+          <p:nvPr/>
+        </p:nvSpPr>
+        <p:spPr>
+          <a:xfrm>
+            <a:off x="533400" y="1905000"/>
+            <a:ext cx="5029200" cy="4114800"/>
+          </a:xfrm>
+          <a:prstGeom prst="rect">
+            <a:avLst/>
+          </a:prstGeom>
+          <a:solidFill>
+            <a:srgbClr val="000000"/>
+          </a:solidFill>
+          <a:ln>
+            <a:noFill/>
+          </a:ln>
+        </p:spPr>
+        <p:style>
+          <a:lnRef idx="1">
+            <a:schemeClr val="accent1"/>
+          </a:lnRef>
+          <a:fillRef idx="3">
+            <a:schemeClr val="accent1"/>
+          </a:fillRef>
+          <a:effectRef idx="2">
+            <a:schemeClr val="accent1"/>
+          </a:effectRef>
+          <a:fontRef idx="minor">
+            <a:schemeClr val="lt1"/>
+          </a:fontRef>
+        </p:style>
+        <p:txBody>
+          <a:bodyPr rtlCol="0" anchor="ctr"/>
           <a:lstStyle/>
           <a:p>
             <a:pPr algn="ctr"/>
-            <a:r>
-              <a:t>[ Diagram: User Code -&gt; Gemini API -&gt; Feedback ]</a:t>
+          </a:p>
+        </p:txBody>
+      </p:sp>
+      <p:sp>
+        <p:nvSpPr>
+          <p:cNvPr id="5" name="Rectangle 4"/>
+          <p:cNvSpPr/>
+          <p:nvPr/>
+        </p:nvSpPr>
+        <p:spPr>
+          <a:xfrm>
+            <a:off x="457200" y="1828800"/>
+            <a:ext cx="5029200" cy="4114800"/>
+          </a:xfrm>
+          <a:prstGeom prst="rect">
+            <a:avLst/>
+          </a:prstGeom>
+          <a:solidFill>
+            <a:srgbClr val="FFFFFF"/>
+          </a:solidFill>
+          <a:ln w="50800">
+            <a:solidFill>
+              <a:srgbClr val="000000"/>
+            </a:solidFill>
+          </a:ln>
+        </p:spPr>
+        <p:style>
+          <a:lnRef idx="1">
+            <a:schemeClr val="accent1"/>
+          </a:lnRef>
+          <a:fillRef idx="3">
+            <a:schemeClr val="accent1"/>
+          </a:fillRef>
+          <a:effectRef idx="2">
+            <a:schemeClr val="accent1"/>
+          </a:effectRef>
+          <a:fontRef idx="minor">
+            <a:schemeClr val="lt1"/>
+          </a:fontRef>
+        </p:style>
+        <p:txBody>
+          <a:bodyPr rtlCol="0" anchor="ctr"/>
+          <a:lstStyle/>
+          <a:p>
+            <a:pPr algn="ctr"/>
+          </a:p>
+          <a:p>
+            <a:pPr>
+              <a:spcBef>
+                <a:spcPts val="1200"/>
+              </a:spcBef>
+            </a:pPr>
+            <a:r>
+              <a:rPr sz="2400" b="1">
+                <a:latin typeface="Arial"/>
+              </a:rPr>
+              <a:t>- Predict Output: Test understanding</a:t>
+            </a:r>
+          </a:p>
+          <a:p>
+            <a:pPr>
+              <a:spcBef>
+                <a:spcPts val="1200"/>
+              </a:spcBef>
+            </a:pPr>
+            <a:r>
+              <a:rPr sz="2400" b="1">
+                <a:latin typeface="Arial"/>
+              </a:rPr>
+              <a:t>- Drag &amp; Drop: Build correct syntax</a:t>
+            </a:r>
+          </a:p>
+          <a:p>
+            <a:pPr>
+              <a:spcBef>
+                <a:spcPts val="1200"/>
+              </a:spcBef>
+            </a:pPr>
+            <a:r>
+              <a:rPr sz="2400" b="1">
+                <a:latin typeface="Arial"/>
+              </a:rPr>
+              <a:t>- Refactor: Improve existing code</a:t>
+            </a:r>
+          </a:p>
+          <a:p>
+            <a:pPr>
+              <a:spcBef>
+                <a:spcPts val="1200"/>
+              </a:spcBef>
+            </a:pPr>
+            <a:r>
+              <a:rPr sz="2400" b="1">
+                <a:latin typeface="Arial"/>
+              </a:rPr>
+              <a:t>- Editor: Practice real coding</a:t>
+            </a:r>
+          </a:p>
+        </p:txBody>
+      </p:sp>
+      <p:sp>
+        <p:nvSpPr>
+          <p:cNvPr id="6" name="Rectangle 5"/>
+          <p:cNvSpPr/>
+          <p:nvPr/>
+        </p:nvSpPr>
+        <p:spPr>
+          <a:xfrm>
+            <a:off x="6019800" y="1905000"/>
+            <a:ext cx="5486400" cy="4114800"/>
+          </a:xfrm>
+          <a:prstGeom prst="rect">
+            <a:avLst/>
+          </a:prstGeom>
+          <a:solidFill>
+            <a:srgbClr val="000000"/>
+          </a:solidFill>
+          <a:ln>
+            <a:noFill/>
+          </a:ln>
+        </p:spPr>
+        <p:style>
+          <a:lnRef idx="1">
+            <a:schemeClr val="accent1"/>
+          </a:lnRef>
+          <a:fillRef idx="3">
+            <a:schemeClr val="accent1"/>
+          </a:fillRef>
+          <a:effectRef idx="2">
+            <a:schemeClr val="accent1"/>
+          </a:effectRef>
+          <a:fontRef idx="minor">
+            <a:schemeClr val="lt1"/>
+          </a:fontRef>
+        </p:style>
+        <p:txBody>
+          <a:bodyPr rtlCol="0" anchor="ctr"/>
+          <a:lstStyle/>
+          <a:p>
+            <a:pPr algn="ctr"/>
+          </a:p>
+        </p:txBody>
+      </p:sp>
+      <p:sp>
+        <p:nvSpPr>
+          <p:cNvPr id="7" name="Rectangle 6"/>
+          <p:cNvSpPr/>
+          <p:nvPr/>
+        </p:nvSpPr>
+        <p:spPr>
+          <a:xfrm>
+            <a:off x="5943600" y="1828800"/>
+            <a:ext cx="5486400" cy="4114800"/>
+          </a:xfrm>
+          <a:prstGeom prst="rect">
+            <a:avLst/>
+          </a:prstGeom>
+          <a:solidFill>
+            <a:srgbClr val="FFFFFF"/>
+          </a:solidFill>
+          <a:ln w="50800">
+            <a:solidFill>
+              <a:srgbClr val="000000"/>
+            </a:solidFill>
+          </a:ln>
+        </p:spPr>
+        <p:style>
+          <a:lnRef idx="1">
+            <a:schemeClr val="accent1"/>
+          </a:lnRef>
+          <a:fillRef idx="3">
+            <a:schemeClr val="accent1"/>
+          </a:fillRef>
+          <a:effectRef idx="2">
+            <a:schemeClr val="accent1"/>
+          </a:effectRef>
+          <a:fontRef idx="minor">
+            <a:schemeClr val="lt1"/>
+          </a:fontRef>
+        </p:style>
+        <p:txBody>
+          <a:bodyPr rtlCol="0" anchor="ctr"/>
+          <a:lstStyle/>
+          <a:p>
+            <a:pPr algn="ctr"/>
+            <a:r>
+              <a:rPr sz="2400" b="1">
+                <a:solidFill>
+                  <a:srgbClr val="000000"/>
+                </a:solidFill>
+                <a:latin typeface="Arial"/>
+              </a:rPr>
+              <a:t>[ challenge_screen.png ]
+Place screenshot in scripts/assets/</a:t>
             </a:r>
           </a:p>
         </p:txBody>
@@ -3972,6 +5338,14 @@
 <file path=ppt/slides/slide7.xml><?xml version="1.0" encoding="utf-8"?>
 <p:sld xmlns:a="http://schemas.openxmlformats.org/drawingml/2006/main" xmlns:p="http://schemas.openxmlformats.org/presentationml/2006/main" xmlns:r="http://schemas.openxmlformats.org/officeDocument/2006/relationships">
   <p:cSld>
+    <p:bg>
+      <p:bgPr>
+        <a:solidFill>
+          <a:srgbClr val="F0F0F0"/>
+        </a:solidFill>
+        <a:effectLst/>
+      </p:bgPr>
+    </p:bg>
     <p:spTree>
       <p:nvGrpSpPr>
         <p:cNvPr id="1" name=""/>
@@ -3981,81 +5355,23 @@
       <p:grpSpPr/>
       <p:sp>
         <p:nvSpPr>
-          <p:cNvPr id="2" name="Title 1"/>
-          <p:cNvSpPr>
-            <a:spLocks noGrp="1"/>
-          </p:cNvSpPr>
-          <p:nvPr>
-            <p:ph type="title"/>
-          </p:nvPr>
-        </p:nvSpPr>
-        <p:spPr/>
-        <p:txBody>
-          <a:bodyPr/>
-          <a:lstStyle/>
-          <a:p>
-            <a:r>
-              <a:t>Retention &amp; Gamification</a:t>
-            </a:r>
-          </a:p>
-        </p:txBody>
-      </p:sp>
-      <p:sp>
-        <p:nvSpPr>
-          <p:cNvPr id="3" name="Content Placeholder 2"/>
-          <p:cNvSpPr>
-            <a:spLocks noGrp="1"/>
-          </p:cNvSpPr>
-          <p:nvPr>
-            <p:ph idx="1"/>
-          </p:nvPr>
-        </p:nvSpPr>
-        <p:spPr/>
-        <p:txBody>
-          <a:bodyPr/>
-          <a:lstStyle/>
-          <a:p/>
-          <a:p>
-            <a:pPr/>
-            <a:r>
-              <a:t>Streaks: Psychological hook for daily habits.</a:t>
-            </a:r>
-          </a:p>
-          <a:p>
-            <a:pPr/>
-            <a:r>
-              <a:t>Leaderboards: Social competition and status.</a:t>
-            </a:r>
-          </a:p>
-          <a:p>
-            <a:pPr/>
-            <a:r>
-              <a:t>Health System: Encourages precision and focus.</a:t>
-            </a:r>
-          </a:p>
-        </p:txBody>
-      </p:sp>
-      <p:sp>
-        <p:nvSpPr>
-          <p:cNvPr id="4" name="Rectangle 3"/>
+          <p:cNvPr id="2" name="Rectangle 1"/>
           <p:cNvSpPr/>
           <p:nvPr/>
         </p:nvSpPr>
         <p:spPr>
           <a:xfrm>
-            <a:off x="5029200" y="1371600"/>
-            <a:ext cx="3200400" cy="4114800"/>
+            <a:off x="533400" y="533400"/>
+            <a:ext cx="5486400" cy="914400"/>
           </a:xfrm>
           <a:prstGeom prst="rect">
             <a:avLst/>
           </a:prstGeom>
           <a:solidFill>
-            <a:srgbClr val="F0F0F0"/>
-          </a:solidFill>
-          <a:ln w="25400">
-            <a:solidFill>
-              <a:srgbClr val="000000"/>
-            </a:solidFill>
+            <a:srgbClr val="000000"/>
+          </a:solidFill>
+          <a:ln>
+            <a:noFill/>
           </a:ln>
         </p:spPr>
         <p:style>
@@ -4082,29 +5398,292 @@
       </p:sp>
       <p:sp>
         <p:nvSpPr>
-          <p:cNvPr id="5" name="TextBox 4"/>
-          <p:cNvSpPr txBox="1"/>
+          <p:cNvPr id="3" name="Rectangle 2"/>
+          <p:cNvSpPr/>
           <p:nvPr/>
         </p:nvSpPr>
         <p:spPr>
           <a:xfrm>
-            <a:off x="5029200" y="2971800"/>
-            <a:ext cx="3200400" cy="914400"/>
+            <a:off x="457200" y="457200"/>
+            <a:ext cx="5486400" cy="914400"/>
           </a:xfrm>
           <a:prstGeom prst="rect">
             <a:avLst/>
           </a:prstGeom>
-          <a:noFill/>
-        </p:spPr>
-        <p:txBody>
-          <a:bodyPr wrap="none">
-            <a:spAutoFit/>
-          </a:bodyPr>
+          <a:solidFill>
+            <a:srgbClr val="00FFFF"/>
+          </a:solidFill>
+          <a:ln w="50800">
+            <a:solidFill>
+              <a:srgbClr val="000000"/>
+            </a:solidFill>
+          </a:ln>
+        </p:spPr>
+        <p:style>
+          <a:lnRef idx="1">
+            <a:schemeClr val="accent1"/>
+          </a:lnRef>
+          <a:fillRef idx="3">
+            <a:schemeClr val="accent1"/>
+          </a:fillRef>
+          <a:effectRef idx="2">
+            <a:schemeClr val="accent1"/>
+          </a:effectRef>
+          <a:fontRef idx="minor">
+            <a:schemeClr val="lt1"/>
+          </a:fontRef>
+        </p:style>
+        <p:txBody>
+          <a:bodyPr rtlCol="0" anchor="ctr"/>
+          <a:lstStyle/>
+          <a:p>
+            <a:pPr algn="l"/>
+            <a:r>
+              <a:rPr sz="4000" b="1">
+                <a:solidFill>
+                  <a:srgbClr val="000000"/>
+                </a:solidFill>
+                <a:latin typeface="Arial"/>
+              </a:rPr>
+              <a:t>AI Engine</a:t>
+            </a:r>
+          </a:p>
+        </p:txBody>
+      </p:sp>
+      <p:sp>
+        <p:nvSpPr>
+          <p:cNvPr id="4" name="Rectangle 3"/>
+          <p:cNvSpPr/>
+          <p:nvPr/>
+        </p:nvSpPr>
+        <p:spPr>
+          <a:xfrm>
+            <a:off x="533400" y="1905000"/>
+            <a:ext cx="5029200" cy="4114800"/>
+          </a:xfrm>
+          <a:prstGeom prst="rect">
+            <a:avLst/>
+          </a:prstGeom>
+          <a:solidFill>
+            <a:srgbClr val="000000"/>
+          </a:solidFill>
+          <a:ln>
+            <a:noFill/>
+          </a:ln>
+        </p:spPr>
+        <p:style>
+          <a:lnRef idx="1">
+            <a:schemeClr val="accent1"/>
+          </a:lnRef>
+          <a:fillRef idx="3">
+            <a:schemeClr val="accent1"/>
+          </a:fillRef>
+          <a:effectRef idx="2">
+            <a:schemeClr val="accent1"/>
+          </a:effectRef>
+          <a:fontRef idx="minor">
+            <a:schemeClr val="lt1"/>
+          </a:fontRef>
+        </p:style>
+        <p:txBody>
+          <a:bodyPr rtlCol="0" anchor="ctr"/>
           <a:lstStyle/>
           <a:p>
             <a:pPr algn="ctr"/>
-            <a:r>
-              <a:t>[ Screenshot of Leaderboard and Profile stats ]</a:t>
+          </a:p>
+        </p:txBody>
+      </p:sp>
+      <p:sp>
+        <p:nvSpPr>
+          <p:cNvPr id="5" name="Rectangle 4"/>
+          <p:cNvSpPr/>
+          <p:nvPr/>
+        </p:nvSpPr>
+        <p:spPr>
+          <a:xfrm>
+            <a:off x="457200" y="1828800"/>
+            <a:ext cx="5029200" cy="4114800"/>
+          </a:xfrm>
+          <a:prstGeom prst="rect">
+            <a:avLst/>
+          </a:prstGeom>
+          <a:solidFill>
+            <a:srgbClr val="FFFFFF"/>
+          </a:solidFill>
+          <a:ln w="50800">
+            <a:solidFill>
+              <a:srgbClr val="000000"/>
+            </a:solidFill>
+          </a:ln>
+        </p:spPr>
+        <p:style>
+          <a:lnRef idx="1">
+            <a:schemeClr val="accent1"/>
+          </a:lnRef>
+          <a:fillRef idx="3">
+            <a:schemeClr val="accent1"/>
+          </a:fillRef>
+          <a:effectRef idx="2">
+            <a:schemeClr val="accent1"/>
+          </a:effectRef>
+          <a:fontRef idx="minor">
+            <a:schemeClr val="lt1"/>
+          </a:fontRef>
+        </p:style>
+        <p:txBody>
+          <a:bodyPr rtlCol="0" anchor="ctr"/>
+          <a:lstStyle/>
+          <a:p>
+            <a:pPr algn="ctr"/>
+          </a:p>
+          <a:p>
+            <a:pPr>
+              <a:spcBef>
+                <a:spcPts val="1200"/>
+              </a:spcBef>
+            </a:pPr>
+            <a:r>
+              <a:rPr sz="2400" b="1">
+                <a:latin typeface="Arial"/>
+              </a:rPr>
+              <a:t>- Dynamically generated challenges</a:t>
+            </a:r>
+          </a:p>
+          <a:p>
+            <a:pPr>
+              <a:spcBef>
+                <a:spcPts val="1200"/>
+              </a:spcBef>
+            </a:pPr>
+            <a:r>
+              <a:rPr sz="2400" b="1">
+                <a:latin typeface="Arial"/>
+              </a:rPr>
+              <a:t>- Smart evaluation of code</a:t>
+            </a:r>
+          </a:p>
+          <a:p>
+            <a:pPr>
+              <a:spcBef>
+                <a:spcPts val="1200"/>
+              </a:spcBef>
+            </a:pPr>
+            <a:r>
+              <a:rPr sz="2400" b="1">
+                <a:latin typeface="Arial"/>
+              </a:rPr>
+              <a:t>- Context-aware hints</a:t>
+            </a:r>
+          </a:p>
+          <a:p>
+            <a:pPr>
+              <a:spcBef>
+                <a:spcPts val="1200"/>
+              </a:spcBef>
+            </a:pPr>
+            <a:r>
+              <a:rPr sz="2400" b="1">
+                <a:latin typeface="Arial"/>
+              </a:rPr>
+              <a:t>- Personalized learning pace</a:t>
+            </a:r>
+          </a:p>
+        </p:txBody>
+      </p:sp>
+      <p:sp>
+        <p:nvSpPr>
+          <p:cNvPr id="6" name="Rectangle 5"/>
+          <p:cNvSpPr/>
+          <p:nvPr/>
+        </p:nvSpPr>
+        <p:spPr>
+          <a:xfrm>
+            <a:off x="6019800" y="1905000"/>
+            <a:ext cx="5486400" cy="4114800"/>
+          </a:xfrm>
+          <a:prstGeom prst="rect">
+            <a:avLst/>
+          </a:prstGeom>
+          <a:solidFill>
+            <a:srgbClr val="000000"/>
+          </a:solidFill>
+          <a:ln>
+            <a:noFill/>
+          </a:ln>
+        </p:spPr>
+        <p:style>
+          <a:lnRef idx="1">
+            <a:schemeClr val="accent1"/>
+          </a:lnRef>
+          <a:fillRef idx="3">
+            <a:schemeClr val="accent1"/>
+          </a:fillRef>
+          <a:effectRef idx="2">
+            <a:schemeClr val="accent1"/>
+          </a:effectRef>
+          <a:fontRef idx="minor">
+            <a:schemeClr val="lt1"/>
+          </a:fontRef>
+        </p:style>
+        <p:txBody>
+          <a:bodyPr rtlCol="0" anchor="ctr"/>
+          <a:lstStyle/>
+          <a:p>
+            <a:pPr algn="ctr"/>
+          </a:p>
+        </p:txBody>
+      </p:sp>
+      <p:sp>
+        <p:nvSpPr>
+          <p:cNvPr id="7" name="Rectangle 6"/>
+          <p:cNvSpPr/>
+          <p:nvPr/>
+        </p:nvSpPr>
+        <p:spPr>
+          <a:xfrm>
+            <a:off x="5943600" y="1828800"/>
+            <a:ext cx="5486400" cy="4114800"/>
+          </a:xfrm>
+          <a:prstGeom prst="rect">
+            <a:avLst/>
+          </a:prstGeom>
+          <a:solidFill>
+            <a:srgbClr val="FFFFFF"/>
+          </a:solidFill>
+          <a:ln w="50800">
+            <a:solidFill>
+              <a:srgbClr val="000000"/>
+            </a:solidFill>
+          </a:ln>
+        </p:spPr>
+        <p:style>
+          <a:lnRef idx="1">
+            <a:schemeClr val="accent1"/>
+          </a:lnRef>
+          <a:fillRef idx="3">
+            <a:schemeClr val="accent1"/>
+          </a:fillRef>
+          <a:effectRef idx="2">
+            <a:schemeClr val="accent1"/>
+          </a:effectRef>
+          <a:fontRef idx="minor">
+            <a:schemeClr val="lt1"/>
+          </a:fontRef>
+        </p:style>
+        <p:txBody>
+          <a:bodyPr rtlCol="0" anchor="ctr"/>
+          <a:lstStyle/>
+          <a:p>
+            <a:pPr algn="ctr"/>
+            <a:r>
+              <a:rPr sz="2400" b="1">
+                <a:solidFill>
+                  <a:srgbClr val="000000"/>
+                </a:solidFill>
+                <a:latin typeface="Arial"/>
+              </a:rPr>
+              <a:t>[ challenge_screen.png ]
+Place screenshot in scripts/assets/</a:t>
             </a:r>
           </a:p>
         </p:txBody>
@@ -4120,6 +5699,14 @@
 <file path=ppt/slides/slide8.xml><?xml version="1.0" encoding="utf-8"?>
 <p:sld xmlns:a="http://schemas.openxmlformats.org/drawingml/2006/main" xmlns:p="http://schemas.openxmlformats.org/presentationml/2006/main" xmlns:r="http://schemas.openxmlformats.org/officeDocument/2006/relationships">
   <p:cSld>
+    <p:bg>
+      <p:bgPr>
+        <a:solidFill>
+          <a:srgbClr val="F0F0F0"/>
+        </a:solidFill>
+        <a:effectLst/>
+      </p:bgPr>
+    </p:bg>
     <p:spTree>
       <p:nvGrpSpPr>
         <p:cNvPr id="1" name=""/>
@@ -4129,81 +5716,23 @@
       <p:grpSpPr/>
       <p:sp>
         <p:nvSpPr>
-          <p:cNvPr id="2" name="Title 1"/>
-          <p:cNvSpPr>
-            <a:spLocks noGrp="1"/>
-          </p:cNvSpPr>
-          <p:nvPr>
-            <p:ph type="title"/>
-          </p:nvPr>
-        </p:nvSpPr>
-        <p:spPr/>
-        <p:txBody>
-          <a:bodyPr/>
-          <a:lstStyle/>
-          <a:p>
-            <a:r>
-              <a:t>Technical Stack</a:t>
-            </a:r>
-          </a:p>
-        </p:txBody>
-      </p:sp>
-      <p:sp>
-        <p:nvSpPr>
-          <p:cNvPr id="3" name="Content Placeholder 2"/>
-          <p:cNvSpPr>
-            <a:spLocks noGrp="1"/>
-          </p:cNvSpPr>
-          <p:nvPr>
-            <p:ph idx="1"/>
-          </p:nvPr>
-        </p:nvSpPr>
-        <p:spPr/>
-        <p:txBody>
-          <a:bodyPr/>
-          <a:lstStyle/>
-          <a:p/>
-          <a:p>
-            <a:pPr/>
-            <a:r>
-              <a:t>Frontend: Next.js 15, Tailwind CSS, Monaco Editor.</a:t>
-            </a:r>
-          </a:p>
-          <a:p>
-            <a:pPr/>
-            <a:r>
-              <a:t>Backend: FastAPI, SQLAlchemy, SQLite.</a:t>
-            </a:r>
-          </a:p>
-          <a:p>
-            <a:pPr/>
-            <a:r>
-              <a:t>AI: Google Gemini 2.0 Flash.</a:t>
-            </a:r>
-          </a:p>
-        </p:txBody>
-      </p:sp>
-      <p:sp>
-        <p:nvSpPr>
-          <p:cNvPr id="4" name="Rectangle 3"/>
+          <p:cNvPr id="2" name="Rectangle 1"/>
           <p:cNvSpPr/>
           <p:nvPr/>
         </p:nvSpPr>
         <p:spPr>
           <a:xfrm>
-            <a:off x="5029200" y="1371600"/>
-            <a:ext cx="3200400" cy="4114800"/>
+            <a:off x="533400" y="533400"/>
+            <a:ext cx="5486400" cy="914400"/>
           </a:xfrm>
           <a:prstGeom prst="rect">
             <a:avLst/>
           </a:prstGeom>
           <a:solidFill>
-            <a:srgbClr val="F0F0F0"/>
-          </a:solidFill>
-          <a:ln w="25400">
-            <a:solidFill>
-              <a:srgbClr val="000000"/>
-            </a:solidFill>
+            <a:srgbClr val="000000"/>
+          </a:solidFill>
+          <a:ln>
+            <a:noFill/>
           </a:ln>
         </p:spPr>
         <p:style>
@@ -4230,29 +5759,292 @@
       </p:sp>
       <p:sp>
         <p:nvSpPr>
-          <p:cNvPr id="5" name="TextBox 4"/>
-          <p:cNvSpPr txBox="1"/>
+          <p:cNvPr id="3" name="Rectangle 2"/>
+          <p:cNvSpPr/>
           <p:nvPr/>
         </p:nvSpPr>
         <p:spPr>
           <a:xfrm>
-            <a:off x="5029200" y="2971800"/>
-            <a:ext cx="3200400" cy="914400"/>
+            <a:off x="457200" y="457200"/>
+            <a:ext cx="5486400" cy="914400"/>
           </a:xfrm>
           <a:prstGeom prst="rect">
             <a:avLst/>
           </a:prstGeom>
-          <a:noFill/>
-        </p:spPr>
-        <p:txBody>
-          <a:bodyPr wrap="none">
-            <a:spAutoFit/>
-          </a:bodyPr>
+          <a:solidFill>
+            <a:srgbClr val="FFFFFF"/>
+          </a:solidFill>
+          <a:ln w="50800">
+            <a:solidFill>
+              <a:srgbClr val="000000"/>
+            </a:solidFill>
+          </a:ln>
+        </p:spPr>
+        <p:style>
+          <a:lnRef idx="1">
+            <a:schemeClr val="accent1"/>
+          </a:lnRef>
+          <a:fillRef idx="3">
+            <a:schemeClr val="accent1"/>
+          </a:fillRef>
+          <a:effectRef idx="2">
+            <a:schemeClr val="accent1"/>
+          </a:effectRef>
+          <a:fontRef idx="minor">
+            <a:schemeClr val="lt1"/>
+          </a:fontRef>
+        </p:style>
+        <p:txBody>
+          <a:bodyPr rtlCol="0" anchor="ctr"/>
+          <a:lstStyle/>
+          <a:p>
+            <a:pPr algn="l"/>
+            <a:r>
+              <a:rPr sz="4000" b="1">
+                <a:solidFill>
+                  <a:srgbClr val="000000"/>
+                </a:solidFill>
+                <a:latin typeface="Arial"/>
+              </a:rPr>
+              <a:t>Technical Stack</a:t>
+            </a:r>
+          </a:p>
+        </p:txBody>
+      </p:sp>
+      <p:sp>
+        <p:nvSpPr>
+          <p:cNvPr id="4" name="Rectangle 3"/>
+          <p:cNvSpPr/>
+          <p:nvPr/>
+        </p:nvSpPr>
+        <p:spPr>
+          <a:xfrm>
+            <a:off x="533400" y="1905000"/>
+            <a:ext cx="5029200" cy="4114800"/>
+          </a:xfrm>
+          <a:prstGeom prst="rect">
+            <a:avLst/>
+          </a:prstGeom>
+          <a:solidFill>
+            <a:srgbClr val="000000"/>
+          </a:solidFill>
+          <a:ln>
+            <a:noFill/>
+          </a:ln>
+        </p:spPr>
+        <p:style>
+          <a:lnRef idx="1">
+            <a:schemeClr val="accent1"/>
+          </a:lnRef>
+          <a:fillRef idx="3">
+            <a:schemeClr val="accent1"/>
+          </a:fillRef>
+          <a:effectRef idx="2">
+            <a:schemeClr val="accent1"/>
+          </a:effectRef>
+          <a:fontRef idx="minor">
+            <a:schemeClr val="lt1"/>
+          </a:fontRef>
+        </p:style>
+        <p:txBody>
+          <a:bodyPr rtlCol="0" anchor="ctr"/>
           <a:lstStyle/>
           <a:p>
             <a:pPr algn="ctr"/>
-            <a:r>
-              <a:t>[ Tech Stack Icons/Diagram ]</a:t>
+          </a:p>
+        </p:txBody>
+      </p:sp>
+      <p:sp>
+        <p:nvSpPr>
+          <p:cNvPr id="5" name="Rectangle 4"/>
+          <p:cNvSpPr/>
+          <p:nvPr/>
+        </p:nvSpPr>
+        <p:spPr>
+          <a:xfrm>
+            <a:off x="457200" y="1828800"/>
+            <a:ext cx="5029200" cy="4114800"/>
+          </a:xfrm>
+          <a:prstGeom prst="rect">
+            <a:avLst/>
+          </a:prstGeom>
+          <a:solidFill>
+            <a:srgbClr val="FFFFFF"/>
+          </a:solidFill>
+          <a:ln w="50800">
+            <a:solidFill>
+              <a:srgbClr val="000000"/>
+            </a:solidFill>
+          </a:ln>
+        </p:spPr>
+        <p:style>
+          <a:lnRef idx="1">
+            <a:schemeClr val="accent1"/>
+          </a:lnRef>
+          <a:fillRef idx="3">
+            <a:schemeClr val="accent1"/>
+          </a:fillRef>
+          <a:effectRef idx="2">
+            <a:schemeClr val="accent1"/>
+          </a:effectRef>
+          <a:fontRef idx="minor">
+            <a:schemeClr val="lt1"/>
+          </a:fontRef>
+        </p:style>
+        <p:txBody>
+          <a:bodyPr rtlCol="0" anchor="ctr"/>
+          <a:lstStyle/>
+          <a:p>
+            <a:pPr algn="ctr"/>
+          </a:p>
+          <a:p>
+            <a:pPr>
+              <a:spcBef>
+                <a:spcPts val="1200"/>
+              </a:spcBef>
+            </a:pPr>
+            <a:r>
+              <a:rPr sz="2400" b="1">
+                <a:latin typeface="Arial"/>
+              </a:rPr>
+              <a:t>- Frontend: Next.js + Tailwind</a:t>
+            </a:r>
+          </a:p>
+          <a:p>
+            <a:pPr>
+              <a:spcBef>
+                <a:spcPts val="1200"/>
+              </a:spcBef>
+            </a:pPr>
+            <a:r>
+              <a:rPr sz="2400" b="1">
+                <a:latin typeface="Arial"/>
+              </a:rPr>
+              <a:t>- Backend: FastAPI</a:t>
+            </a:r>
+          </a:p>
+          <a:p>
+            <a:pPr>
+              <a:spcBef>
+                <a:spcPts val="1200"/>
+              </a:spcBef>
+            </a:pPr>
+            <a:r>
+              <a:rPr sz="2400" b="1">
+                <a:latin typeface="Arial"/>
+              </a:rPr>
+              <a:t>- AI: Gemini API</a:t>
+            </a:r>
+          </a:p>
+          <a:p>
+            <a:pPr>
+              <a:spcBef>
+                <a:spcPts val="1200"/>
+              </a:spcBef>
+            </a:pPr>
+            <a:r>
+              <a:rPr sz="2400" b="1">
+                <a:latin typeface="Arial"/>
+              </a:rPr>
+              <a:t>- Editor: Monaco Editor</a:t>
+            </a:r>
+          </a:p>
+        </p:txBody>
+      </p:sp>
+      <p:sp>
+        <p:nvSpPr>
+          <p:cNvPr id="6" name="Rectangle 5"/>
+          <p:cNvSpPr/>
+          <p:nvPr/>
+        </p:nvSpPr>
+        <p:spPr>
+          <a:xfrm>
+            <a:off x="6019800" y="1905000"/>
+            <a:ext cx="5486400" cy="4114800"/>
+          </a:xfrm>
+          <a:prstGeom prst="rect">
+            <a:avLst/>
+          </a:prstGeom>
+          <a:solidFill>
+            <a:srgbClr val="000000"/>
+          </a:solidFill>
+          <a:ln>
+            <a:noFill/>
+          </a:ln>
+        </p:spPr>
+        <p:style>
+          <a:lnRef idx="1">
+            <a:schemeClr val="accent1"/>
+          </a:lnRef>
+          <a:fillRef idx="3">
+            <a:schemeClr val="accent1"/>
+          </a:fillRef>
+          <a:effectRef idx="2">
+            <a:schemeClr val="accent1"/>
+          </a:effectRef>
+          <a:fontRef idx="minor">
+            <a:schemeClr val="lt1"/>
+          </a:fontRef>
+        </p:style>
+        <p:txBody>
+          <a:bodyPr rtlCol="0" anchor="ctr"/>
+          <a:lstStyle/>
+          <a:p>
+            <a:pPr algn="ctr"/>
+          </a:p>
+        </p:txBody>
+      </p:sp>
+      <p:sp>
+        <p:nvSpPr>
+          <p:cNvPr id="7" name="Rectangle 6"/>
+          <p:cNvSpPr/>
+          <p:nvPr/>
+        </p:nvSpPr>
+        <p:spPr>
+          <a:xfrm>
+            <a:off x="5943600" y="1828800"/>
+            <a:ext cx="5486400" cy="4114800"/>
+          </a:xfrm>
+          <a:prstGeom prst="rect">
+            <a:avLst/>
+          </a:prstGeom>
+          <a:solidFill>
+            <a:srgbClr val="FFFFFF"/>
+          </a:solidFill>
+          <a:ln w="50800">
+            <a:solidFill>
+              <a:srgbClr val="000000"/>
+            </a:solidFill>
+          </a:ln>
+        </p:spPr>
+        <p:style>
+          <a:lnRef idx="1">
+            <a:schemeClr val="accent1"/>
+          </a:lnRef>
+          <a:fillRef idx="3">
+            <a:schemeClr val="accent1"/>
+          </a:fillRef>
+          <a:effectRef idx="2">
+            <a:schemeClr val="accent1"/>
+          </a:effectRef>
+          <a:fontRef idx="minor">
+            <a:schemeClr val="lt1"/>
+          </a:fontRef>
+        </p:style>
+        <p:txBody>
+          <a:bodyPr rtlCol="0" anchor="ctr"/>
+          <a:lstStyle/>
+          <a:p>
+            <a:pPr algn="ctr"/>
+            <a:r>
+              <a:rPr sz="2400" b="1">
+                <a:solidFill>
+                  <a:srgbClr val="000000"/>
+                </a:solidFill>
+                <a:latin typeface="Arial"/>
+              </a:rPr>
+              <a:t>[ landing_screen.png ]
+Place screenshot in scripts/assets/</a:t>
             </a:r>
           </a:p>
         </p:txBody>
@@ -4268,6 +6060,14 @@
 <file path=ppt/slides/slide9.xml><?xml version="1.0" encoding="utf-8"?>
 <p:sld xmlns:a="http://schemas.openxmlformats.org/drawingml/2006/main" xmlns:p="http://schemas.openxmlformats.org/presentationml/2006/main" xmlns:r="http://schemas.openxmlformats.org/officeDocument/2006/relationships">
   <p:cSld>
+    <p:bg>
+      <p:bgPr>
+        <a:solidFill>
+          <a:srgbClr val="F0F0F0"/>
+        </a:solidFill>
+        <a:effectLst/>
+      </p:bgPr>
+    </p:bg>
     <p:spTree>
       <p:nvGrpSpPr>
         <p:cNvPr id="1" name=""/>
@@ -4277,81 +6077,23 @@
       <p:grpSpPr/>
       <p:sp>
         <p:nvSpPr>
-          <p:cNvPr id="2" name="Title 1"/>
-          <p:cNvSpPr>
-            <a:spLocks noGrp="1"/>
-          </p:cNvSpPr>
-          <p:nvPr>
-            <p:ph type="title"/>
-          </p:nvPr>
-        </p:nvSpPr>
-        <p:spPr/>
-        <p:txBody>
-          <a:bodyPr/>
-          <a:lstStyle/>
-          <a:p>
-            <a:r>
-              <a:t>The Future Vision</a:t>
-            </a:r>
-          </a:p>
-        </p:txBody>
-      </p:sp>
-      <p:sp>
-        <p:nvSpPr>
-          <p:cNvPr id="3" name="Content Placeholder 2"/>
-          <p:cNvSpPr>
-            <a:spLocks noGrp="1"/>
-          </p:cNvSpPr>
-          <p:nvPr>
-            <p:ph idx="1"/>
-          </p:nvPr>
-        </p:nvSpPr>
-        <p:spPr/>
-        <p:txBody>
-          <a:bodyPr/>
-          <a:lstStyle/>
-          <a:p/>
-          <a:p>
-            <a:pPr/>
-            <a:r>
-              <a:t>Project-based learning modules.</a:t>
-            </a:r>
-          </a:p>
-          <a:p>
-            <a:pPr/>
-            <a:r>
-              <a:t>Multi-player 'Code Duels'.</a:t>
-            </a:r>
-          </a:p>
-          <a:p>
-            <a:pPr/>
-            <a:r>
-              <a:t>Enterprise/Team training portals.</a:t>
-            </a:r>
-          </a:p>
-        </p:txBody>
-      </p:sp>
-      <p:sp>
-        <p:nvSpPr>
-          <p:cNvPr id="4" name="Rectangle 3"/>
+          <p:cNvPr id="2" name="Rectangle 1"/>
           <p:cNvSpPr/>
           <p:nvPr/>
         </p:nvSpPr>
         <p:spPr>
           <a:xfrm>
-            <a:off x="5029200" y="1371600"/>
-            <a:ext cx="3200400" cy="4114800"/>
+            <a:off x="533400" y="533400"/>
+            <a:ext cx="5486400" cy="914400"/>
           </a:xfrm>
           <a:prstGeom prst="rect">
             <a:avLst/>
           </a:prstGeom>
           <a:solidFill>
-            <a:srgbClr val="F0F0F0"/>
-          </a:solidFill>
-          <a:ln w="25400">
-            <a:solidFill>
-              <a:srgbClr val="000000"/>
-            </a:solidFill>
+            <a:srgbClr val="000000"/>
+          </a:solidFill>
+          <a:ln>
+            <a:noFill/>
           </a:ln>
         </p:spPr>
         <p:style>
@@ -4378,29 +6120,292 @@
       </p:sp>
       <p:sp>
         <p:nvSpPr>
-          <p:cNvPr id="5" name="TextBox 4"/>
-          <p:cNvSpPr txBox="1"/>
+          <p:cNvPr id="3" name="Rectangle 2"/>
+          <p:cNvSpPr/>
           <p:nvPr/>
         </p:nvSpPr>
         <p:spPr>
           <a:xfrm>
-            <a:off x="5029200" y="2971800"/>
-            <a:ext cx="3200400" cy="914400"/>
+            <a:off x="457200" y="457200"/>
+            <a:ext cx="5486400" cy="914400"/>
           </a:xfrm>
           <a:prstGeom prst="rect">
             <a:avLst/>
           </a:prstGeom>
-          <a:noFill/>
-        </p:spPr>
-        <p:txBody>
-          <a:bodyPr wrap="none">
-            <a:spAutoFit/>
-          </a:bodyPr>
+          <a:solidFill>
+            <a:srgbClr val="FFE600"/>
+          </a:solidFill>
+          <a:ln w="50800">
+            <a:solidFill>
+              <a:srgbClr val="000000"/>
+            </a:solidFill>
+          </a:ln>
+        </p:spPr>
+        <p:style>
+          <a:lnRef idx="1">
+            <a:schemeClr val="accent1"/>
+          </a:lnRef>
+          <a:fillRef idx="3">
+            <a:schemeClr val="accent1"/>
+          </a:fillRef>
+          <a:effectRef idx="2">
+            <a:schemeClr val="accent1"/>
+          </a:effectRef>
+          <a:fontRef idx="minor">
+            <a:schemeClr val="lt1"/>
+          </a:fontRef>
+        </p:style>
+        <p:txBody>
+          <a:bodyPr rtlCol="0" anchor="ctr"/>
+          <a:lstStyle/>
+          <a:p>
+            <a:pPr algn="l"/>
+            <a:r>
+              <a:rPr sz="4000" b="1">
+                <a:solidFill>
+                  <a:srgbClr val="000000"/>
+                </a:solidFill>
+                <a:latin typeface="Arial"/>
+              </a:rPr>
+              <a:t>Future Vision</a:t>
+            </a:r>
+          </a:p>
+        </p:txBody>
+      </p:sp>
+      <p:sp>
+        <p:nvSpPr>
+          <p:cNvPr id="4" name="Rectangle 3"/>
+          <p:cNvSpPr/>
+          <p:nvPr/>
+        </p:nvSpPr>
+        <p:spPr>
+          <a:xfrm>
+            <a:off x="533400" y="1905000"/>
+            <a:ext cx="5029200" cy="4114800"/>
+          </a:xfrm>
+          <a:prstGeom prst="rect">
+            <a:avLst/>
+          </a:prstGeom>
+          <a:solidFill>
+            <a:srgbClr val="000000"/>
+          </a:solidFill>
+          <a:ln>
+            <a:noFill/>
+          </a:ln>
+        </p:spPr>
+        <p:style>
+          <a:lnRef idx="1">
+            <a:schemeClr val="accent1"/>
+          </a:lnRef>
+          <a:fillRef idx="3">
+            <a:schemeClr val="accent1"/>
+          </a:fillRef>
+          <a:effectRef idx="2">
+            <a:schemeClr val="accent1"/>
+          </a:effectRef>
+          <a:fontRef idx="minor">
+            <a:schemeClr val="lt1"/>
+          </a:fontRef>
+        </p:style>
+        <p:txBody>
+          <a:bodyPr rtlCol="0" anchor="ctr"/>
           <a:lstStyle/>
           <a:p>
             <a:pPr algn="ctr"/>
-            <a:r>
-              <a:t>[ Mockup of a Project dashboard ]</a:t>
+          </a:p>
+        </p:txBody>
+      </p:sp>
+      <p:sp>
+        <p:nvSpPr>
+          <p:cNvPr id="5" name="Rectangle 4"/>
+          <p:cNvSpPr/>
+          <p:nvPr/>
+        </p:nvSpPr>
+        <p:spPr>
+          <a:xfrm>
+            <a:off x="457200" y="1828800"/>
+            <a:ext cx="5029200" cy="4114800"/>
+          </a:xfrm>
+          <a:prstGeom prst="rect">
+            <a:avLst/>
+          </a:prstGeom>
+          <a:solidFill>
+            <a:srgbClr val="FFFFFF"/>
+          </a:solidFill>
+          <a:ln w="50800">
+            <a:solidFill>
+              <a:srgbClr val="000000"/>
+            </a:solidFill>
+          </a:ln>
+        </p:spPr>
+        <p:style>
+          <a:lnRef idx="1">
+            <a:schemeClr val="accent1"/>
+          </a:lnRef>
+          <a:fillRef idx="3">
+            <a:schemeClr val="accent1"/>
+          </a:fillRef>
+          <a:effectRef idx="2">
+            <a:schemeClr val="accent1"/>
+          </a:effectRef>
+          <a:fontRef idx="minor">
+            <a:schemeClr val="lt1"/>
+          </a:fontRef>
+        </p:style>
+        <p:txBody>
+          <a:bodyPr rtlCol="0" anchor="ctr"/>
+          <a:lstStyle/>
+          <a:p>
+            <a:pPr algn="ctr"/>
+          </a:p>
+          <a:p>
+            <a:pPr>
+              <a:spcBef>
+                <a:spcPts val="1200"/>
+              </a:spcBef>
+            </a:pPr>
+            <a:r>
+              <a:rPr sz="2400" b="1">
+                <a:latin typeface="Arial"/>
+              </a:rPr>
+              <a:t>- Multiplayer coding challenges</a:t>
+            </a:r>
+          </a:p>
+          <a:p>
+            <a:pPr>
+              <a:spcBef>
+                <a:spcPts val="1200"/>
+              </a:spcBef>
+            </a:pPr>
+            <a:r>
+              <a:rPr sz="2400" b="1">
+                <a:latin typeface="Arial"/>
+              </a:rPr>
+              <a:t>- Real-world project modules</a:t>
+            </a:r>
+          </a:p>
+          <a:p>
+            <a:pPr>
+              <a:spcBef>
+                <a:spcPts val="1200"/>
+              </a:spcBef>
+            </a:pPr>
+            <a:r>
+              <a:rPr sz="2400" b="1">
+                <a:latin typeface="Arial"/>
+              </a:rPr>
+              <a:t>- Enterprise learning platform</a:t>
+            </a:r>
+          </a:p>
+          <a:p>
+            <a:pPr>
+              <a:spcBef>
+                <a:spcPts val="1200"/>
+              </a:spcBef>
+            </a:pPr>
+            <a:r>
+              <a:rPr sz="2400" b="1">
+                <a:latin typeface="Arial"/>
+              </a:rPr>
+              <a:t>- Skill-based progression system</a:t>
+            </a:r>
+          </a:p>
+        </p:txBody>
+      </p:sp>
+      <p:sp>
+        <p:nvSpPr>
+          <p:cNvPr id="6" name="Rectangle 5"/>
+          <p:cNvSpPr/>
+          <p:nvPr/>
+        </p:nvSpPr>
+        <p:spPr>
+          <a:xfrm>
+            <a:off x="6019800" y="1905000"/>
+            <a:ext cx="5486400" cy="4114800"/>
+          </a:xfrm>
+          <a:prstGeom prst="rect">
+            <a:avLst/>
+          </a:prstGeom>
+          <a:solidFill>
+            <a:srgbClr val="000000"/>
+          </a:solidFill>
+          <a:ln>
+            <a:noFill/>
+          </a:ln>
+        </p:spPr>
+        <p:style>
+          <a:lnRef idx="1">
+            <a:schemeClr val="accent1"/>
+          </a:lnRef>
+          <a:fillRef idx="3">
+            <a:schemeClr val="accent1"/>
+          </a:fillRef>
+          <a:effectRef idx="2">
+            <a:schemeClr val="accent1"/>
+          </a:effectRef>
+          <a:fontRef idx="minor">
+            <a:schemeClr val="lt1"/>
+          </a:fontRef>
+        </p:style>
+        <p:txBody>
+          <a:bodyPr rtlCol="0" anchor="ctr"/>
+          <a:lstStyle/>
+          <a:p>
+            <a:pPr algn="ctr"/>
+          </a:p>
+        </p:txBody>
+      </p:sp>
+      <p:sp>
+        <p:nvSpPr>
+          <p:cNvPr id="7" name="Rectangle 6"/>
+          <p:cNvSpPr/>
+          <p:nvPr/>
+        </p:nvSpPr>
+        <p:spPr>
+          <a:xfrm>
+            <a:off x="5943600" y="1828800"/>
+            <a:ext cx="5486400" cy="4114800"/>
+          </a:xfrm>
+          <a:prstGeom prst="rect">
+            <a:avLst/>
+          </a:prstGeom>
+          <a:solidFill>
+            <a:srgbClr val="FFFFFF"/>
+          </a:solidFill>
+          <a:ln w="50800">
+            <a:solidFill>
+              <a:srgbClr val="000000"/>
+            </a:solidFill>
+          </a:ln>
+        </p:spPr>
+        <p:style>
+          <a:lnRef idx="1">
+            <a:schemeClr val="accent1"/>
+          </a:lnRef>
+          <a:fillRef idx="3">
+            <a:schemeClr val="accent1"/>
+          </a:fillRef>
+          <a:effectRef idx="2">
+            <a:schemeClr val="accent1"/>
+          </a:effectRef>
+          <a:fontRef idx="minor">
+            <a:schemeClr val="lt1"/>
+          </a:fontRef>
+        </p:style>
+        <p:txBody>
+          <a:bodyPr rtlCol="0" anchor="ctr"/>
+          <a:lstStyle/>
+          <a:p>
+            <a:pPr algn="ctr"/>
+            <a:r>
+              <a:rPr sz="2400" b="1">
+                <a:solidFill>
+                  <a:srgbClr val="000000"/>
+                </a:solidFill>
+                <a:latin typeface="Arial"/>
+              </a:rPr>
+              <a:t>[ leaderboard_screen.png ]
+Place screenshot in scripts/assets/</a:t>
             </a:r>
           </a:p>
         </p:txBody>
